--- a/Mapped Curriculum Lessons/Grade 8/Lesson 29 - Updating 2D List Cells/Updating 2D List Cells - Slides.pptx
+++ b/Mapped Curriculum Lessons/Grade 8/Lesson 29 - Updating 2D List Cells/Updating 2D List Cells - Slides.pptx
@@ -2,28 +2,28 @@
 <file path=ppt/presentation.xml><?xml version="1.0" encoding="utf-8"?>
 <p:presentation xmlns:p="http://schemas.openxmlformats.org/presentationml/2006/main" embedTrueTypeFonts="1" saveSubsetFonts="0">
   <p:sldMasterIdLst>
-    <p:sldMasterId xmlns:r="http://schemas.openxmlformats.org/officeDocument/2006/relationships" id="2147483648" r:id="Racc634a710c64638"/>
+    <p:sldMasterId xmlns:r="http://schemas.openxmlformats.org/officeDocument/2006/relationships" id="2147483648" r:id="R4690f5536e974fea"/>
   </p:sldMasterIdLst>
   <p:notesMasterIdLst>
-    <p:notesMasterId xmlns:r="http://schemas.openxmlformats.org/officeDocument/2006/relationships" r:id="Rd6fe3287da1448ec"/>
+    <p:notesMasterId xmlns:r="http://schemas.openxmlformats.org/officeDocument/2006/relationships" r:id="Rcf09e73d47aa447a"/>
   </p:notesMasterIdLst>
   <p:sldIdLst>
-    <p:sldId xmlns:r="http://schemas.openxmlformats.org/officeDocument/2006/relationships" id="256" r:id="Rf0bacd62c98f4a60"/>
-    <p:sldId xmlns:r="http://schemas.openxmlformats.org/officeDocument/2006/relationships" id="257" r:id="R82bdbad0c8474b4d"/>
-    <p:sldId xmlns:r="http://schemas.openxmlformats.org/officeDocument/2006/relationships" id="258" r:id="R862ca4d34e8347e2"/>
-    <p:sldId xmlns:r="http://schemas.openxmlformats.org/officeDocument/2006/relationships" id="259" r:id="R4715b078038d4a89"/>
-    <p:sldId xmlns:r="http://schemas.openxmlformats.org/officeDocument/2006/relationships" id="260" r:id="R796812465b7148ce"/>
-    <p:sldId xmlns:r="http://schemas.openxmlformats.org/officeDocument/2006/relationships" id="261" r:id="Ra7bcb4ee6c33442d"/>
-    <p:sldId xmlns:r="http://schemas.openxmlformats.org/officeDocument/2006/relationships" id="262" r:id="Rcb8b9e7ea96c4d63"/>
-    <p:sldId xmlns:r="http://schemas.openxmlformats.org/officeDocument/2006/relationships" id="263" r:id="Rbe44ab11598f46e2"/>
-    <p:sldId xmlns:r="http://schemas.openxmlformats.org/officeDocument/2006/relationships" id="264" r:id="R93616333aa6941f1"/>
+    <p:sldId xmlns:r="http://schemas.openxmlformats.org/officeDocument/2006/relationships" id="256" r:id="R884eb4c900c04693"/>
+    <p:sldId xmlns:r="http://schemas.openxmlformats.org/officeDocument/2006/relationships" id="257" r:id="Rc028fe4bf3324e97"/>
+    <p:sldId xmlns:r="http://schemas.openxmlformats.org/officeDocument/2006/relationships" id="258" r:id="R8eedf2cf6bc34db6"/>
+    <p:sldId xmlns:r="http://schemas.openxmlformats.org/officeDocument/2006/relationships" id="259" r:id="Rd3d66edb0aae4f05"/>
+    <p:sldId xmlns:r="http://schemas.openxmlformats.org/officeDocument/2006/relationships" id="260" r:id="Rc32519944c8c423d"/>
+    <p:sldId xmlns:r="http://schemas.openxmlformats.org/officeDocument/2006/relationships" id="261" r:id="Rcc45ef2649df4e85"/>
+    <p:sldId xmlns:r="http://schemas.openxmlformats.org/officeDocument/2006/relationships" id="262" r:id="R0915a221e68348dd"/>
+    <p:sldId xmlns:r="http://schemas.openxmlformats.org/officeDocument/2006/relationships" id="263" r:id="R514dbe333d2f4f58"/>
+    <p:sldId xmlns:r="http://schemas.openxmlformats.org/officeDocument/2006/relationships" id="264" r:id="R2b8e1a9faa20460f"/>
   </p:sldIdLst>
   <p:sldSz cx="12192000" cy="6858000"/>
   <p:notesSz cx="6858000" cy="9144000"/>
   <p:embeddedFontLst>
     <p:embeddedFont>
       <p:font typeface="JetBrains Mono"/>
-      <p:regular xmlns:r="http://schemas.openxmlformats.org/officeDocument/2006/relationships" r:id="R403f8ceef2834aa7"/>
+      <p:regular xmlns:r="http://schemas.openxmlformats.org/officeDocument/2006/relationships" r:id="Reb8ed505d6f941a0"/>
     </p:embeddedFont>
   </p:embeddedFontLst>
 </p:presentation>
@@ -1071,7 +1071,7 @@
           <p:nvPr/>
         </p:nvPicPr>
         <p:blipFill rotWithShape="1">
-          <a:blip xmlns:r="http://schemas.openxmlformats.org/officeDocument/2006/relationships" xmlns:a="http://schemas.openxmlformats.org/drawingml/2006/main" r:embed="R66beb9d5b64a4104"/>
+          <a:blip xmlns:r="http://schemas.openxmlformats.org/officeDocument/2006/relationships" xmlns:a="http://schemas.openxmlformats.org/drawingml/2006/main" r:embed="Rdb198ff1477e4f0c"/>
           <a:stretch xmlns:a="http://schemas.openxmlformats.org/drawingml/2006/main"/>
         </p:blipFill>
         <p:spPr>
@@ -1451,7 +1451,7 @@
           <p:nvPr/>
         </p:nvPicPr>
         <p:blipFill rotWithShape="1">
-          <a:blip xmlns:r="http://schemas.openxmlformats.org/officeDocument/2006/relationships" xmlns:a="http://schemas.openxmlformats.org/drawingml/2006/main" r:embed="R99d3250b893544cf">
+          <a:blip xmlns:r="http://schemas.openxmlformats.org/officeDocument/2006/relationships" xmlns:a="http://schemas.openxmlformats.org/drawingml/2006/main" r:embed="Ra9c12690fe0845b3">
             <a:alphaModFix amt="28000"/>
           </a:blip>
           <a:stretch xmlns:a="http://schemas.openxmlformats.org/drawingml/2006/main"/>
@@ -1664,7 +1664,7 @@
           <p:nvPr/>
         </p:nvPicPr>
         <p:blipFill rotWithShape="1">
-          <a:blip xmlns:r="http://schemas.openxmlformats.org/officeDocument/2006/relationships" xmlns:a="http://schemas.openxmlformats.org/drawingml/2006/main" r:embed="R81eb32aa9e9d4c90">
+          <a:blip xmlns:r="http://schemas.openxmlformats.org/officeDocument/2006/relationships" xmlns:a="http://schemas.openxmlformats.org/drawingml/2006/main" r:embed="R79345e88f0fe4b50">
             <a:alphaModFix amt="28000"/>
           </a:blip>
           <a:stretch xmlns:a="http://schemas.openxmlformats.org/drawingml/2006/main"/>
@@ -1899,7 +1899,7 @@
           <p:nvPr/>
         </p:nvPicPr>
         <p:blipFill rotWithShape="1">
-          <a:blip xmlns:r="http://schemas.openxmlformats.org/officeDocument/2006/relationships" xmlns:a="http://schemas.openxmlformats.org/drawingml/2006/main" r:embed="R3e0a3e0b2fc64e23">
+          <a:blip xmlns:r="http://schemas.openxmlformats.org/officeDocument/2006/relationships" xmlns:a="http://schemas.openxmlformats.org/drawingml/2006/main" r:embed="Rb58f0d59e3f3482a">
             <a:alphaModFix amt="28000"/>
           </a:blip>
           <a:stretch xmlns:a="http://schemas.openxmlformats.org/drawingml/2006/main"/>
@@ -2176,7 +2176,7 @@
           <p:nvPr/>
         </p:nvPicPr>
         <p:blipFill rotWithShape="1">
-          <a:blip xmlns:r="http://schemas.openxmlformats.org/officeDocument/2006/relationships" xmlns:a="http://schemas.openxmlformats.org/drawingml/2006/main" r:embed="Rf870a9bf68b04549">
+          <a:blip xmlns:r="http://schemas.openxmlformats.org/officeDocument/2006/relationships" xmlns:a="http://schemas.openxmlformats.org/drawingml/2006/main" r:embed="Re98e62be16e94bd9">
             <a:alphaModFix amt="28000"/>
           </a:blip>
           <a:stretch xmlns:a="http://schemas.openxmlformats.org/drawingml/2006/main"/>
@@ -2451,7 +2451,7 @@
           <p:nvPr/>
         </p:nvPicPr>
         <p:blipFill rotWithShape="1">
-          <a:blip xmlns:r="http://schemas.openxmlformats.org/officeDocument/2006/relationships" xmlns:a="http://schemas.openxmlformats.org/drawingml/2006/main" r:embed="R5c8fc38d5c87423b">
+          <a:blip xmlns:r="http://schemas.openxmlformats.org/officeDocument/2006/relationships" xmlns:a="http://schemas.openxmlformats.org/drawingml/2006/main" r:embed="R8a99667c40ce4b79">
             <a:alphaModFix amt="28000"/>
           </a:blip>
           <a:stretch xmlns:a="http://schemas.openxmlformats.org/drawingml/2006/main"/>
@@ -2875,7 +2875,7 @@
           <p:nvPr/>
         </p:nvPicPr>
         <p:blipFill rotWithShape="1">
-          <a:blip xmlns:r="http://schemas.openxmlformats.org/officeDocument/2006/relationships" xmlns:a="http://schemas.openxmlformats.org/drawingml/2006/main" r:embed="R418a99ae2df94475">
+          <a:blip xmlns:r="http://schemas.openxmlformats.org/officeDocument/2006/relationships" xmlns:a="http://schemas.openxmlformats.org/drawingml/2006/main" r:embed="R724b6dcddff147a0">
             <a:alphaModFix amt="28000"/>
           </a:blip>
           <a:stretch xmlns:a="http://schemas.openxmlformats.org/drawingml/2006/main"/>
@@ -3016,7 +3016,7 @@
           <p:nvPr/>
         </p:nvPicPr>
         <p:blipFill rotWithShape="1">
-          <a:blip xmlns:r="http://schemas.openxmlformats.org/officeDocument/2006/relationships" xmlns:a="http://schemas.openxmlformats.org/drawingml/2006/main" r:embed="R65d3d50001a94839">
+          <a:blip xmlns:r="http://schemas.openxmlformats.org/officeDocument/2006/relationships" xmlns:a="http://schemas.openxmlformats.org/drawingml/2006/main" r:embed="R8a3e8822e1f149aa">
             <a:alphaModFix amt="28000"/>
           </a:blip>
           <a:stretch xmlns:a="http://schemas.openxmlformats.org/drawingml/2006/main"/>
@@ -3130,7 +3130,7 @@
           <p:nvPr/>
         </p:nvPicPr>
         <p:blipFill rotWithShape="1">
-          <a:blip xmlns:r="http://schemas.openxmlformats.org/officeDocument/2006/relationships" xmlns:a="http://schemas.openxmlformats.org/drawingml/2006/main" r:embed="Rcd700c2aee0e49fe">
+          <a:blip xmlns:r="http://schemas.openxmlformats.org/officeDocument/2006/relationships" xmlns:a="http://schemas.openxmlformats.org/drawingml/2006/main" r:embed="Rd96a0bb7dd714ba4">
             <a:alphaModFix amt="28000"/>
           </a:blip>
           <a:stretch xmlns:a="http://schemas.openxmlformats.org/drawingml/2006/main"/>
@@ -3457,7 +3457,7 @@
           <p:nvPr/>
         </p:nvPicPr>
         <p:blipFill rotWithShape="1">
-          <a:blip xmlns:r="http://schemas.openxmlformats.org/officeDocument/2006/relationships" xmlns:a="http://schemas.openxmlformats.org/drawingml/2006/main" r:embed="R7da68d6bb9b1465b">
+          <a:blip xmlns:r="http://schemas.openxmlformats.org/officeDocument/2006/relationships" xmlns:a="http://schemas.openxmlformats.org/drawingml/2006/main" r:embed="R86c1de64a7254d17">
             <a:alphaModFix amt="28000"/>
           </a:blip>
           <a:stretch xmlns:a="http://schemas.openxmlformats.org/drawingml/2006/main"/>
@@ -3745,7 +3745,7 @@
           <p:nvPr/>
         </p:nvPicPr>
         <p:blipFill rotWithShape="1">
-          <a:blip xmlns:r="http://schemas.openxmlformats.org/officeDocument/2006/relationships" xmlns:a="http://schemas.openxmlformats.org/drawingml/2006/main" r:embed="Rdda48ccf9788452d">
+          <a:blip xmlns:r="http://schemas.openxmlformats.org/officeDocument/2006/relationships" xmlns:a="http://schemas.openxmlformats.org/drawingml/2006/main" r:embed="Re231f6c434384ccf">
             <a:alphaModFix amt="28000"/>
           </a:blip>
           <a:stretch xmlns:a="http://schemas.openxmlformats.org/drawingml/2006/main"/>
@@ -3982,17 +3982,17 @@
   </p:cSld>
   <p:clrMap bg1="lt1" tx1="dk1" bg2="lt2" tx2="dk2" accent1="accent1" accent2="accent2" accent3="accent3" accent4="accent4" accent5="accent5" accent6="accent6" hlink="hlink" folHlink="folHlink"/>
   <p:sldLayoutIdLst>
-    <p:sldLayoutId xmlns:r="http://schemas.openxmlformats.org/officeDocument/2006/relationships" id="2147483649" r:id="R28952d677e974df6"/>
-    <p:sldLayoutId xmlns:r="http://schemas.openxmlformats.org/officeDocument/2006/relationships" id="2147483650" r:id="R1a1f38bd3e4d409a"/>
-    <p:sldLayoutId xmlns:r="http://schemas.openxmlformats.org/officeDocument/2006/relationships" id="2147483651" r:id="Rb1dbc290719b408c"/>
-    <p:sldLayoutId xmlns:r="http://schemas.openxmlformats.org/officeDocument/2006/relationships" id="2147483652" r:id="R09e7cbeda9d04249"/>
-    <p:sldLayoutId xmlns:r="http://schemas.openxmlformats.org/officeDocument/2006/relationships" id="2147483653" r:id="Re4030aea7c9f4362"/>
-    <p:sldLayoutId xmlns:r="http://schemas.openxmlformats.org/officeDocument/2006/relationships" id="2147483654" r:id="Rd9c927f4133b452b"/>
-    <p:sldLayoutId xmlns:r="http://schemas.openxmlformats.org/officeDocument/2006/relationships" id="2147483655" r:id="R00b97e8214814e9f"/>
-    <p:sldLayoutId xmlns:r="http://schemas.openxmlformats.org/officeDocument/2006/relationships" id="2147483656" r:id="R778663b07b624f41"/>
-    <p:sldLayoutId xmlns:r="http://schemas.openxmlformats.org/officeDocument/2006/relationships" id="2147483657" r:id="R4ceb0f46742d4275"/>
-    <p:sldLayoutId xmlns:r="http://schemas.openxmlformats.org/officeDocument/2006/relationships" id="2147483658" r:id="Ra02fba55f9714f30"/>
-    <p:sldLayoutId xmlns:r="http://schemas.openxmlformats.org/officeDocument/2006/relationships" id="2147483659" r:id="R249b5c3b460b4e62"/>
+    <p:sldLayoutId xmlns:r="http://schemas.openxmlformats.org/officeDocument/2006/relationships" id="2147483649" r:id="R5025a33609ac4018"/>
+    <p:sldLayoutId xmlns:r="http://schemas.openxmlformats.org/officeDocument/2006/relationships" id="2147483650" r:id="R9e6a332da9904409"/>
+    <p:sldLayoutId xmlns:r="http://schemas.openxmlformats.org/officeDocument/2006/relationships" id="2147483651" r:id="Rdbfb502e3d3c402d"/>
+    <p:sldLayoutId xmlns:r="http://schemas.openxmlformats.org/officeDocument/2006/relationships" id="2147483652" r:id="Racb118d1013f416e"/>
+    <p:sldLayoutId xmlns:r="http://schemas.openxmlformats.org/officeDocument/2006/relationships" id="2147483653" r:id="R46b3b51c0c434fdc"/>
+    <p:sldLayoutId xmlns:r="http://schemas.openxmlformats.org/officeDocument/2006/relationships" id="2147483654" r:id="R05f170bbb10e4024"/>
+    <p:sldLayoutId xmlns:r="http://schemas.openxmlformats.org/officeDocument/2006/relationships" id="2147483655" r:id="R747d571c9a2943ba"/>
+    <p:sldLayoutId xmlns:r="http://schemas.openxmlformats.org/officeDocument/2006/relationships" id="2147483656" r:id="Rd359443b719943ea"/>
+    <p:sldLayoutId xmlns:r="http://schemas.openxmlformats.org/officeDocument/2006/relationships" id="2147483657" r:id="R2f6d307ab1f24e67"/>
+    <p:sldLayoutId xmlns:r="http://schemas.openxmlformats.org/officeDocument/2006/relationships" id="2147483658" r:id="Rf90acc18cfbd45c4"/>
+    <p:sldLayoutId xmlns:r="http://schemas.openxmlformats.org/officeDocument/2006/relationships" id="2147483659" r:id="Re19a4d455d874fb0"/>
   </p:sldLayoutIdLst>
   <p:hf hdr="0" ftr="0" dt="0"/>
   <p:txStyles>

--- a/Mapped Curriculum Lessons/Grade 8/Lesson 29 - Updating 2D List Cells/Updating 2D List Cells - Slides.pptx
+++ b/Mapped Curriculum Lessons/Grade 8/Lesson 29 - Updating 2D List Cells/Updating 2D List Cells - Slides.pptx
@@ -2,28 +2,28 @@
 <file path=ppt/presentation.xml><?xml version="1.0" encoding="utf-8"?>
 <p:presentation xmlns:p="http://schemas.openxmlformats.org/presentationml/2006/main" embedTrueTypeFonts="1" saveSubsetFonts="0">
   <p:sldMasterIdLst>
-    <p:sldMasterId xmlns:r="http://schemas.openxmlformats.org/officeDocument/2006/relationships" id="2147483648" r:id="R4690f5536e974fea"/>
+    <p:sldMasterId xmlns:r="http://schemas.openxmlformats.org/officeDocument/2006/relationships" id="2147483648" r:id="R01469dcd686949d2"/>
   </p:sldMasterIdLst>
   <p:notesMasterIdLst>
-    <p:notesMasterId xmlns:r="http://schemas.openxmlformats.org/officeDocument/2006/relationships" r:id="Rcf09e73d47aa447a"/>
+    <p:notesMasterId xmlns:r="http://schemas.openxmlformats.org/officeDocument/2006/relationships" r:id="R5b8a11f8fbc94303"/>
   </p:notesMasterIdLst>
   <p:sldIdLst>
-    <p:sldId xmlns:r="http://schemas.openxmlformats.org/officeDocument/2006/relationships" id="256" r:id="R884eb4c900c04693"/>
-    <p:sldId xmlns:r="http://schemas.openxmlformats.org/officeDocument/2006/relationships" id="257" r:id="Rc028fe4bf3324e97"/>
-    <p:sldId xmlns:r="http://schemas.openxmlformats.org/officeDocument/2006/relationships" id="258" r:id="R8eedf2cf6bc34db6"/>
-    <p:sldId xmlns:r="http://schemas.openxmlformats.org/officeDocument/2006/relationships" id="259" r:id="Rd3d66edb0aae4f05"/>
-    <p:sldId xmlns:r="http://schemas.openxmlformats.org/officeDocument/2006/relationships" id="260" r:id="Rc32519944c8c423d"/>
-    <p:sldId xmlns:r="http://schemas.openxmlformats.org/officeDocument/2006/relationships" id="261" r:id="Rcc45ef2649df4e85"/>
-    <p:sldId xmlns:r="http://schemas.openxmlformats.org/officeDocument/2006/relationships" id="262" r:id="R0915a221e68348dd"/>
-    <p:sldId xmlns:r="http://schemas.openxmlformats.org/officeDocument/2006/relationships" id="263" r:id="R514dbe333d2f4f58"/>
-    <p:sldId xmlns:r="http://schemas.openxmlformats.org/officeDocument/2006/relationships" id="264" r:id="R2b8e1a9faa20460f"/>
+    <p:sldId xmlns:r="http://schemas.openxmlformats.org/officeDocument/2006/relationships" id="256" r:id="R0fb0d5c59f414d2e"/>
+    <p:sldId xmlns:r="http://schemas.openxmlformats.org/officeDocument/2006/relationships" id="257" r:id="R447f50d63ca94bc4"/>
+    <p:sldId xmlns:r="http://schemas.openxmlformats.org/officeDocument/2006/relationships" id="258" r:id="R981b8cfdb2514ded"/>
+    <p:sldId xmlns:r="http://schemas.openxmlformats.org/officeDocument/2006/relationships" id="259" r:id="Ree9ac6be67164661"/>
+    <p:sldId xmlns:r="http://schemas.openxmlformats.org/officeDocument/2006/relationships" id="260" r:id="R4eb7f4881aec49f4"/>
+    <p:sldId xmlns:r="http://schemas.openxmlformats.org/officeDocument/2006/relationships" id="261" r:id="R5ed04a9330324b8b"/>
+    <p:sldId xmlns:r="http://schemas.openxmlformats.org/officeDocument/2006/relationships" id="262" r:id="R4f974a3f3fe5423b"/>
+    <p:sldId xmlns:r="http://schemas.openxmlformats.org/officeDocument/2006/relationships" id="263" r:id="R2add5e1e18524793"/>
+    <p:sldId xmlns:r="http://schemas.openxmlformats.org/officeDocument/2006/relationships" id="264" r:id="R7460b84975224118"/>
   </p:sldIdLst>
   <p:sldSz cx="12192000" cy="6858000"/>
   <p:notesSz cx="6858000" cy="9144000"/>
   <p:embeddedFontLst>
     <p:embeddedFont>
       <p:font typeface="JetBrains Mono"/>
-      <p:regular xmlns:r="http://schemas.openxmlformats.org/officeDocument/2006/relationships" r:id="Reb8ed505d6f941a0"/>
+      <p:regular xmlns:r="http://schemas.openxmlformats.org/officeDocument/2006/relationships" r:id="Raa605142e4c54537"/>
     </p:embeddedFont>
   </p:embeddedFontLst>
 </p:presentation>
@@ -1071,7 +1071,7 @@
           <p:nvPr/>
         </p:nvPicPr>
         <p:blipFill rotWithShape="1">
-          <a:blip xmlns:r="http://schemas.openxmlformats.org/officeDocument/2006/relationships" xmlns:a="http://schemas.openxmlformats.org/drawingml/2006/main" r:embed="Rdb198ff1477e4f0c"/>
+          <a:blip xmlns:r="http://schemas.openxmlformats.org/officeDocument/2006/relationships" xmlns:a="http://schemas.openxmlformats.org/drawingml/2006/main" r:embed="R665f66ed976a4ba7"/>
           <a:stretch xmlns:a="http://schemas.openxmlformats.org/drawingml/2006/main"/>
         </p:blipFill>
         <p:spPr>
@@ -1451,7 +1451,7 @@
           <p:nvPr/>
         </p:nvPicPr>
         <p:blipFill rotWithShape="1">
-          <a:blip xmlns:r="http://schemas.openxmlformats.org/officeDocument/2006/relationships" xmlns:a="http://schemas.openxmlformats.org/drawingml/2006/main" r:embed="Ra9c12690fe0845b3">
+          <a:blip xmlns:r="http://schemas.openxmlformats.org/officeDocument/2006/relationships" xmlns:a="http://schemas.openxmlformats.org/drawingml/2006/main" r:embed="R68c4ad1bed47424d">
             <a:alphaModFix amt="28000"/>
           </a:blip>
           <a:stretch xmlns:a="http://schemas.openxmlformats.org/drawingml/2006/main"/>
@@ -1664,7 +1664,7 @@
           <p:nvPr/>
         </p:nvPicPr>
         <p:blipFill rotWithShape="1">
-          <a:blip xmlns:r="http://schemas.openxmlformats.org/officeDocument/2006/relationships" xmlns:a="http://schemas.openxmlformats.org/drawingml/2006/main" r:embed="R79345e88f0fe4b50">
+          <a:blip xmlns:r="http://schemas.openxmlformats.org/officeDocument/2006/relationships" xmlns:a="http://schemas.openxmlformats.org/drawingml/2006/main" r:embed="R3dc35d5e832c4675">
             <a:alphaModFix amt="28000"/>
           </a:blip>
           <a:stretch xmlns:a="http://schemas.openxmlformats.org/drawingml/2006/main"/>
@@ -1899,7 +1899,7 @@
           <p:nvPr/>
         </p:nvPicPr>
         <p:blipFill rotWithShape="1">
-          <a:blip xmlns:r="http://schemas.openxmlformats.org/officeDocument/2006/relationships" xmlns:a="http://schemas.openxmlformats.org/drawingml/2006/main" r:embed="Rb58f0d59e3f3482a">
+          <a:blip xmlns:r="http://schemas.openxmlformats.org/officeDocument/2006/relationships" xmlns:a="http://schemas.openxmlformats.org/drawingml/2006/main" r:embed="R5545eb9030bb4d9a">
             <a:alphaModFix amt="28000"/>
           </a:blip>
           <a:stretch xmlns:a="http://schemas.openxmlformats.org/drawingml/2006/main"/>
@@ -2176,7 +2176,7 @@
           <p:nvPr/>
         </p:nvPicPr>
         <p:blipFill rotWithShape="1">
-          <a:blip xmlns:r="http://schemas.openxmlformats.org/officeDocument/2006/relationships" xmlns:a="http://schemas.openxmlformats.org/drawingml/2006/main" r:embed="Re98e62be16e94bd9">
+          <a:blip xmlns:r="http://schemas.openxmlformats.org/officeDocument/2006/relationships" xmlns:a="http://schemas.openxmlformats.org/drawingml/2006/main" r:embed="R22f16ab145f74a12">
             <a:alphaModFix amt="28000"/>
           </a:blip>
           <a:stretch xmlns:a="http://schemas.openxmlformats.org/drawingml/2006/main"/>
@@ -2451,7 +2451,7 @@
           <p:nvPr/>
         </p:nvPicPr>
         <p:blipFill rotWithShape="1">
-          <a:blip xmlns:r="http://schemas.openxmlformats.org/officeDocument/2006/relationships" xmlns:a="http://schemas.openxmlformats.org/drawingml/2006/main" r:embed="R8a99667c40ce4b79">
+          <a:blip xmlns:r="http://schemas.openxmlformats.org/officeDocument/2006/relationships" xmlns:a="http://schemas.openxmlformats.org/drawingml/2006/main" r:embed="Rde14d742eada46f5">
             <a:alphaModFix amt="28000"/>
           </a:blip>
           <a:stretch xmlns:a="http://schemas.openxmlformats.org/drawingml/2006/main"/>
@@ -2875,7 +2875,7 @@
           <p:nvPr/>
         </p:nvPicPr>
         <p:blipFill rotWithShape="1">
-          <a:blip xmlns:r="http://schemas.openxmlformats.org/officeDocument/2006/relationships" xmlns:a="http://schemas.openxmlformats.org/drawingml/2006/main" r:embed="R724b6dcddff147a0">
+          <a:blip xmlns:r="http://schemas.openxmlformats.org/officeDocument/2006/relationships" xmlns:a="http://schemas.openxmlformats.org/drawingml/2006/main" r:embed="R455472a57e034453">
             <a:alphaModFix amt="28000"/>
           </a:blip>
           <a:stretch xmlns:a="http://schemas.openxmlformats.org/drawingml/2006/main"/>
@@ -3016,7 +3016,7 @@
           <p:nvPr/>
         </p:nvPicPr>
         <p:blipFill rotWithShape="1">
-          <a:blip xmlns:r="http://schemas.openxmlformats.org/officeDocument/2006/relationships" xmlns:a="http://schemas.openxmlformats.org/drawingml/2006/main" r:embed="R8a3e8822e1f149aa">
+          <a:blip xmlns:r="http://schemas.openxmlformats.org/officeDocument/2006/relationships" xmlns:a="http://schemas.openxmlformats.org/drawingml/2006/main" r:embed="R24fc5abe078a4689">
             <a:alphaModFix amt="28000"/>
           </a:blip>
           <a:stretch xmlns:a="http://schemas.openxmlformats.org/drawingml/2006/main"/>
@@ -3130,7 +3130,7 @@
           <p:nvPr/>
         </p:nvPicPr>
         <p:blipFill rotWithShape="1">
-          <a:blip xmlns:r="http://schemas.openxmlformats.org/officeDocument/2006/relationships" xmlns:a="http://schemas.openxmlformats.org/drawingml/2006/main" r:embed="Rd96a0bb7dd714ba4">
+          <a:blip xmlns:r="http://schemas.openxmlformats.org/officeDocument/2006/relationships" xmlns:a="http://schemas.openxmlformats.org/drawingml/2006/main" r:embed="Rf8f14943a93c46db">
             <a:alphaModFix amt="28000"/>
           </a:blip>
           <a:stretch xmlns:a="http://schemas.openxmlformats.org/drawingml/2006/main"/>
@@ -3457,7 +3457,7 @@
           <p:nvPr/>
         </p:nvPicPr>
         <p:blipFill rotWithShape="1">
-          <a:blip xmlns:r="http://schemas.openxmlformats.org/officeDocument/2006/relationships" xmlns:a="http://schemas.openxmlformats.org/drawingml/2006/main" r:embed="R86c1de64a7254d17">
+          <a:blip xmlns:r="http://schemas.openxmlformats.org/officeDocument/2006/relationships" xmlns:a="http://schemas.openxmlformats.org/drawingml/2006/main" r:embed="Rbbc80a5db4374344">
             <a:alphaModFix amt="28000"/>
           </a:blip>
           <a:stretch xmlns:a="http://schemas.openxmlformats.org/drawingml/2006/main"/>
@@ -3745,7 +3745,7 @@
           <p:nvPr/>
         </p:nvPicPr>
         <p:blipFill rotWithShape="1">
-          <a:blip xmlns:r="http://schemas.openxmlformats.org/officeDocument/2006/relationships" xmlns:a="http://schemas.openxmlformats.org/drawingml/2006/main" r:embed="Re231f6c434384ccf">
+          <a:blip xmlns:r="http://schemas.openxmlformats.org/officeDocument/2006/relationships" xmlns:a="http://schemas.openxmlformats.org/drawingml/2006/main" r:embed="R608400ae280b4421">
             <a:alphaModFix amt="28000"/>
           </a:blip>
           <a:stretch xmlns:a="http://schemas.openxmlformats.org/drawingml/2006/main"/>
@@ -3982,17 +3982,17 @@
   </p:cSld>
   <p:clrMap bg1="lt1" tx1="dk1" bg2="lt2" tx2="dk2" accent1="accent1" accent2="accent2" accent3="accent3" accent4="accent4" accent5="accent5" accent6="accent6" hlink="hlink" folHlink="folHlink"/>
   <p:sldLayoutIdLst>
-    <p:sldLayoutId xmlns:r="http://schemas.openxmlformats.org/officeDocument/2006/relationships" id="2147483649" r:id="R5025a33609ac4018"/>
-    <p:sldLayoutId xmlns:r="http://schemas.openxmlformats.org/officeDocument/2006/relationships" id="2147483650" r:id="R9e6a332da9904409"/>
-    <p:sldLayoutId xmlns:r="http://schemas.openxmlformats.org/officeDocument/2006/relationships" id="2147483651" r:id="Rdbfb502e3d3c402d"/>
-    <p:sldLayoutId xmlns:r="http://schemas.openxmlformats.org/officeDocument/2006/relationships" id="2147483652" r:id="Racb118d1013f416e"/>
-    <p:sldLayoutId xmlns:r="http://schemas.openxmlformats.org/officeDocument/2006/relationships" id="2147483653" r:id="R46b3b51c0c434fdc"/>
-    <p:sldLayoutId xmlns:r="http://schemas.openxmlformats.org/officeDocument/2006/relationships" id="2147483654" r:id="R05f170bbb10e4024"/>
-    <p:sldLayoutId xmlns:r="http://schemas.openxmlformats.org/officeDocument/2006/relationships" id="2147483655" r:id="R747d571c9a2943ba"/>
-    <p:sldLayoutId xmlns:r="http://schemas.openxmlformats.org/officeDocument/2006/relationships" id="2147483656" r:id="Rd359443b719943ea"/>
-    <p:sldLayoutId xmlns:r="http://schemas.openxmlformats.org/officeDocument/2006/relationships" id="2147483657" r:id="R2f6d307ab1f24e67"/>
-    <p:sldLayoutId xmlns:r="http://schemas.openxmlformats.org/officeDocument/2006/relationships" id="2147483658" r:id="Rf90acc18cfbd45c4"/>
-    <p:sldLayoutId xmlns:r="http://schemas.openxmlformats.org/officeDocument/2006/relationships" id="2147483659" r:id="Re19a4d455d874fb0"/>
+    <p:sldLayoutId xmlns:r="http://schemas.openxmlformats.org/officeDocument/2006/relationships" id="2147483649" r:id="Rf7b0676a46424894"/>
+    <p:sldLayoutId xmlns:r="http://schemas.openxmlformats.org/officeDocument/2006/relationships" id="2147483650" r:id="Ra2ea94bcdc244518"/>
+    <p:sldLayoutId xmlns:r="http://schemas.openxmlformats.org/officeDocument/2006/relationships" id="2147483651" r:id="Rc48585fba9464793"/>
+    <p:sldLayoutId xmlns:r="http://schemas.openxmlformats.org/officeDocument/2006/relationships" id="2147483652" r:id="R385c3827de2c4b15"/>
+    <p:sldLayoutId xmlns:r="http://schemas.openxmlformats.org/officeDocument/2006/relationships" id="2147483653" r:id="R670d2a7b29d64698"/>
+    <p:sldLayoutId xmlns:r="http://schemas.openxmlformats.org/officeDocument/2006/relationships" id="2147483654" r:id="Rd2b6b23e06cd4336"/>
+    <p:sldLayoutId xmlns:r="http://schemas.openxmlformats.org/officeDocument/2006/relationships" id="2147483655" r:id="R88bfef294cd54756"/>
+    <p:sldLayoutId xmlns:r="http://schemas.openxmlformats.org/officeDocument/2006/relationships" id="2147483656" r:id="R761a4a75af3a4d9f"/>
+    <p:sldLayoutId xmlns:r="http://schemas.openxmlformats.org/officeDocument/2006/relationships" id="2147483657" r:id="R7f625ddba40547c2"/>
+    <p:sldLayoutId xmlns:r="http://schemas.openxmlformats.org/officeDocument/2006/relationships" id="2147483658" r:id="R935f7dfc4e654472"/>
+    <p:sldLayoutId xmlns:r="http://schemas.openxmlformats.org/officeDocument/2006/relationships" id="2147483659" r:id="R24fc77b98d9f461b"/>
   </p:sldLayoutIdLst>
   <p:hf hdr="0" ftr="0" dt="0"/>
   <p:txStyles>
@@ -8351,7 +8351,7 @@
         </p:spPr>
         <p:txBody>
           <a:bodyPr xmlns:a="http://schemas.openxmlformats.org/drawingml/2006/main">
-            <a:normAutofit fontScale="100000"/>
+            <a:normAutofit fontScale="87835"/>
           </a:bodyPr>
           <a:lstStyle xmlns:a="http://schemas.openxmlformats.org/drawingml/2006/main"/>
           <a:p xmlns:a="http://schemas.openxmlformats.org/drawingml/2006/main">
@@ -8370,7 +8370,117 @@
                 <a:ea typeface="Calibri"/>
                 <a:cs typeface="Calibri"/>
               </a:rPr>
-              <a:t>Let the user choose a valid row and update both its club name and member count. Display the selected row before and after the two assignments.</a:t>
+              <a:t>Ask for a row from 0 to 2 and store it in [row]. Display </a:t>
+            </a:r>
+            <a:r>
+              <a:rPr sz="2400" b="0">
+                <a:solidFill>
+                  <a:srgbClr val="067D17"/>
+                </a:solidFill>
+                <a:latin typeface="JetBrains Mono"/>
+                <a:ea typeface="JetBrains Mono"/>
+                <a:cs typeface="JetBrains Mono"/>
+              </a:rPr>
+              <a:t>"Before:"</a:t>
+            </a:r>
+            <a:r>
+              <a:rPr sz="2400" b="0">
+                <a:solidFill>
+                  <a:srgbClr val="080808"/>
+                </a:solidFill>
+                <a:latin typeface="Calibri"/>
+                <a:ea typeface="Calibri"/>
+                <a:cs typeface="Calibri"/>
+              </a:rPr>
+              <a:t> followed by [clubs][row]. Ask for a new club name and member count and store them in [new_name] and [new_members]. Update both cells in the selected row, then display </a:t>
+            </a:r>
+            <a:r>
+              <a:rPr sz="2400" b="0">
+                <a:solidFill>
+                  <a:srgbClr val="067D17"/>
+                </a:solidFill>
+                <a:latin typeface="JetBrains Mono"/>
+                <a:ea typeface="JetBrains Mono"/>
+                <a:cs typeface="JetBrains Mono"/>
+              </a:rPr>
+              <a:t>"After:"</a:t>
+            </a:r>
+            <a:r>
+              <a:rPr sz="2400" b="0">
+                <a:solidFill>
+                  <a:srgbClr val="080808"/>
+                </a:solidFill>
+                <a:latin typeface="Calibri"/>
+                <a:ea typeface="Calibri"/>
+                <a:cs typeface="Calibri"/>
+              </a:rPr>
+              <a:t> followed by the updated row. Test row 1, </a:t>
+            </a:r>
+            <a:r>
+              <a:rPr sz="2400" b="0">
+                <a:solidFill>
+                  <a:srgbClr val="067D17"/>
+                </a:solidFill>
+                <a:latin typeface="JetBrains Mono"/>
+                <a:ea typeface="JetBrains Mono"/>
+                <a:cs typeface="JetBrains Mono"/>
+              </a:rPr>
+              <a:t>"Robotics"</a:t>
+            </a:r>
+            <a:r>
+              <a:rPr sz="2400" b="0">
+                <a:solidFill>
+                  <a:srgbClr val="080808"/>
+                </a:solidFill>
+                <a:latin typeface="Calibri"/>
+                <a:ea typeface="Calibri"/>
+                <a:cs typeface="Calibri"/>
+              </a:rPr>
+              <a:t> and 22; display </a:t>
+            </a:r>
+            <a:r>
+              <a:rPr sz="2400" b="0">
+                <a:solidFill>
+                  <a:srgbClr val="067D17"/>
+                </a:solidFill>
+                <a:latin typeface="JetBrains Mono"/>
+                <a:ea typeface="JetBrains Mono"/>
+                <a:cs typeface="JetBrains Mono"/>
+              </a:rPr>
+              <a:t>"Before: ['Chess', 18]"</a:t>
+            </a:r>
+            <a:r>
+              <a:rPr sz="2400" b="0">
+                <a:solidFill>
+                  <a:srgbClr val="080808"/>
+                </a:solidFill>
+                <a:latin typeface="Calibri"/>
+                <a:ea typeface="Calibri"/>
+                <a:cs typeface="Calibri"/>
+              </a:rPr>
+              <a:t> and </a:t>
+            </a:r>
+            <a:r>
+              <a:rPr sz="2400" b="0">
+                <a:solidFill>
+                  <a:srgbClr val="067D17"/>
+                </a:solidFill>
+                <a:latin typeface="JetBrains Mono"/>
+                <a:ea typeface="JetBrains Mono"/>
+                <a:cs typeface="JetBrains Mono"/>
+              </a:rPr>
+              <a:t>"After: ['Robotics', 22]"</a:t>
+            </a:r>
+            <a:r>
+              <a:rPr sz="2400" b="0">
+                <a:solidFill>
+                  <a:srgbClr val="080808"/>
+                </a:solidFill>
+                <a:latin typeface="Calibri"/>
+                <a:ea typeface="Calibri"/>
+                <a:cs typeface="Calibri"/>
+              </a:rPr>
+              <a:t>.</a:t>
             </a:r>
           </a:p>
         </p:txBody>
@@ -9106,7 +9216,7 @@
         </p:spPr>
         <p:txBody>
           <a:bodyPr xmlns:a="http://schemas.openxmlformats.org/drawingml/2006/main">
-            <a:normAutofit fontScale="100000"/>
+            <a:normAutofit fontScale="88445"/>
           </a:bodyPr>
           <a:lstStyle xmlns:a="http://schemas.openxmlformats.org/drawingml/2006/main"/>
           <a:p xmlns:a="http://schemas.openxmlformats.org/drawingml/2006/main">
@@ -9125,7 +9235,95 @@
                 <a:ea typeface="Calibri"/>
                 <a:cs typeface="Calibri"/>
               </a:rPr>
-              <a:t>Create a three-row stock table containing item name and quantity. Ask for a valid row and a delivery amount, add that amount to the existing quantity, then display the updated record and every item quantity.</a:t>
+              <a:t>Store the rows [</a:t>
+            </a:r>
+            <a:r>
+              <a:rPr sz="2400" b="0">
+                <a:solidFill>
+                  <a:srgbClr val="067D17"/>
+                </a:solidFill>
+                <a:latin typeface="JetBrains Mono"/>
+                <a:ea typeface="JetBrains Mono"/>
+                <a:cs typeface="JetBrains Mono"/>
+              </a:rPr>
+              <a:t>'Pens'</a:t>
+            </a:r>
+            <a:r>
+              <a:rPr sz="2400" b="0">
+                <a:solidFill>
+                  <a:srgbClr val="080808"/>
+                </a:solidFill>
+                <a:latin typeface="Calibri"/>
+                <a:ea typeface="Calibri"/>
+                <a:cs typeface="Calibri"/>
+              </a:rPr>
+              <a:t>, 10], [</a:t>
+            </a:r>
+            <a:r>
+              <a:rPr sz="2400" b="0">
+                <a:solidFill>
+                  <a:srgbClr val="067D17"/>
+                </a:solidFill>
+                <a:latin typeface="JetBrains Mono"/>
+                <a:ea typeface="JetBrains Mono"/>
+                <a:cs typeface="JetBrains Mono"/>
+              </a:rPr>
+              <a:t>'Books'</a:t>
+            </a:r>
+            <a:r>
+              <a:rPr sz="2400" b="0">
+                <a:solidFill>
+                  <a:srgbClr val="080808"/>
+                </a:solidFill>
+                <a:latin typeface="Calibri"/>
+                <a:ea typeface="Calibri"/>
+                <a:cs typeface="Calibri"/>
+              </a:rPr>
+              <a:t>, 6] and [</a:t>
+            </a:r>
+            <a:r>
+              <a:rPr sz="2400" b="0">
+                <a:solidFill>
+                  <a:srgbClr val="067D17"/>
+                </a:solidFill>
+                <a:latin typeface="JetBrains Mono"/>
+                <a:ea typeface="JetBrains Mono"/>
+                <a:cs typeface="JetBrains Mono"/>
+              </a:rPr>
+              <a:t>'Tape'</a:t>
+            </a:r>
+            <a:r>
+              <a:rPr sz="2400" b="0">
+                <a:solidFill>
+                  <a:srgbClr val="080808"/>
+                </a:solidFill>
+                <a:latin typeface="Calibri"/>
+                <a:ea typeface="Calibri"/>
+                <a:cs typeface="Calibri"/>
+              </a:rPr>
+              <a:t>, 4] in [stock]. Ask for a row from 0 to 2 and store it in [row]. Ask for a delivery amount and store it in [delivery], then add [delivery] to the quantity at [stock][row][1]. Display the updated row followed by every item name and quantity. Test row 2 and delivery 3; the updated row must be [</a:t>
+            </a:r>
+            <a:r>
+              <a:rPr sz="2400" b="0">
+                <a:solidFill>
+                  <a:srgbClr val="067D17"/>
+                </a:solidFill>
+                <a:latin typeface="JetBrains Mono"/>
+                <a:ea typeface="JetBrains Mono"/>
+                <a:cs typeface="JetBrains Mono"/>
+              </a:rPr>
+              <a:t>'Tape'</a:t>
+            </a:r>
+            <a:r>
+              <a:rPr sz="2400" b="0">
+                <a:solidFill>
+                  <a:srgbClr val="080808"/>
+                </a:solidFill>
+                <a:latin typeface="Calibri"/>
+                <a:ea typeface="Calibri"/>
+                <a:cs typeface="Calibri"/>
+              </a:rPr>
+              <a:t>, 7].</a:t>
             </a:r>
           </a:p>
         </p:txBody>

--- a/Mapped Curriculum Lessons/Grade 8/Lesson 29 - Updating 2D List Cells/Updating 2D List Cells - Slides.pptx
+++ b/Mapped Curriculum Lessons/Grade 8/Lesson 29 - Updating 2D List Cells/Updating 2D List Cells - Slides.pptx
@@ -2,28 +2,28 @@
 <file path=ppt/presentation.xml><?xml version="1.0" encoding="utf-8"?>
 <p:presentation xmlns:p="http://schemas.openxmlformats.org/presentationml/2006/main" embedTrueTypeFonts="1" saveSubsetFonts="0">
   <p:sldMasterIdLst>
-    <p:sldMasterId xmlns:r="http://schemas.openxmlformats.org/officeDocument/2006/relationships" id="2147483648" r:id="R01469dcd686949d2"/>
+    <p:sldMasterId xmlns:r="http://schemas.openxmlformats.org/officeDocument/2006/relationships" id="2147483648" r:id="R049c771542054e0e"/>
   </p:sldMasterIdLst>
   <p:notesMasterIdLst>
-    <p:notesMasterId xmlns:r="http://schemas.openxmlformats.org/officeDocument/2006/relationships" r:id="R5b8a11f8fbc94303"/>
+    <p:notesMasterId xmlns:r="http://schemas.openxmlformats.org/officeDocument/2006/relationships" r:id="Rc5f100719c904f12"/>
   </p:notesMasterIdLst>
   <p:sldIdLst>
-    <p:sldId xmlns:r="http://schemas.openxmlformats.org/officeDocument/2006/relationships" id="256" r:id="R0fb0d5c59f414d2e"/>
-    <p:sldId xmlns:r="http://schemas.openxmlformats.org/officeDocument/2006/relationships" id="257" r:id="R447f50d63ca94bc4"/>
-    <p:sldId xmlns:r="http://schemas.openxmlformats.org/officeDocument/2006/relationships" id="258" r:id="R981b8cfdb2514ded"/>
-    <p:sldId xmlns:r="http://schemas.openxmlformats.org/officeDocument/2006/relationships" id="259" r:id="Ree9ac6be67164661"/>
-    <p:sldId xmlns:r="http://schemas.openxmlformats.org/officeDocument/2006/relationships" id="260" r:id="R4eb7f4881aec49f4"/>
-    <p:sldId xmlns:r="http://schemas.openxmlformats.org/officeDocument/2006/relationships" id="261" r:id="R5ed04a9330324b8b"/>
-    <p:sldId xmlns:r="http://schemas.openxmlformats.org/officeDocument/2006/relationships" id="262" r:id="R4f974a3f3fe5423b"/>
-    <p:sldId xmlns:r="http://schemas.openxmlformats.org/officeDocument/2006/relationships" id="263" r:id="R2add5e1e18524793"/>
-    <p:sldId xmlns:r="http://schemas.openxmlformats.org/officeDocument/2006/relationships" id="264" r:id="R7460b84975224118"/>
+    <p:sldId xmlns:r="http://schemas.openxmlformats.org/officeDocument/2006/relationships" id="256" r:id="Rda2b749c3b8347c2"/>
+    <p:sldId xmlns:r="http://schemas.openxmlformats.org/officeDocument/2006/relationships" id="257" r:id="R52c6d753e0af4745"/>
+    <p:sldId xmlns:r="http://schemas.openxmlformats.org/officeDocument/2006/relationships" id="258" r:id="R7015807dd9094c21"/>
+    <p:sldId xmlns:r="http://schemas.openxmlformats.org/officeDocument/2006/relationships" id="259" r:id="Rd3af26115b524b89"/>
+    <p:sldId xmlns:r="http://schemas.openxmlformats.org/officeDocument/2006/relationships" id="260" r:id="R67b6c2ceb0a2438f"/>
+    <p:sldId xmlns:r="http://schemas.openxmlformats.org/officeDocument/2006/relationships" id="261" r:id="Re99ede8a468741ac"/>
+    <p:sldId xmlns:r="http://schemas.openxmlformats.org/officeDocument/2006/relationships" id="262" r:id="R8ad727c7f3234ea2"/>
+    <p:sldId xmlns:r="http://schemas.openxmlformats.org/officeDocument/2006/relationships" id="263" r:id="R6af1b18c1dc24d11"/>
+    <p:sldId xmlns:r="http://schemas.openxmlformats.org/officeDocument/2006/relationships" id="264" r:id="Rbbc3139c87b04ad9"/>
   </p:sldIdLst>
   <p:sldSz cx="12192000" cy="6858000"/>
   <p:notesSz cx="6858000" cy="9144000"/>
   <p:embeddedFontLst>
     <p:embeddedFont>
       <p:font typeface="JetBrains Mono"/>
-      <p:regular xmlns:r="http://schemas.openxmlformats.org/officeDocument/2006/relationships" r:id="Raa605142e4c54537"/>
+      <p:regular xmlns:r="http://schemas.openxmlformats.org/officeDocument/2006/relationships" r:id="Rb1f494eab7314c4c"/>
     </p:embeddedFont>
   </p:embeddedFontLst>
 </p:presentation>
@@ -1071,7 +1071,7 @@
           <p:nvPr/>
         </p:nvPicPr>
         <p:blipFill rotWithShape="1">
-          <a:blip xmlns:r="http://schemas.openxmlformats.org/officeDocument/2006/relationships" xmlns:a="http://schemas.openxmlformats.org/drawingml/2006/main" r:embed="R665f66ed976a4ba7"/>
+          <a:blip xmlns:r="http://schemas.openxmlformats.org/officeDocument/2006/relationships" xmlns:a="http://schemas.openxmlformats.org/drawingml/2006/main" r:embed="Rf637f5d17caf4885"/>
           <a:stretch xmlns:a="http://schemas.openxmlformats.org/drawingml/2006/main"/>
         </p:blipFill>
         <p:spPr>
@@ -1451,7 +1451,7 @@
           <p:nvPr/>
         </p:nvPicPr>
         <p:blipFill rotWithShape="1">
-          <a:blip xmlns:r="http://schemas.openxmlformats.org/officeDocument/2006/relationships" xmlns:a="http://schemas.openxmlformats.org/drawingml/2006/main" r:embed="R68c4ad1bed47424d">
+          <a:blip xmlns:r="http://schemas.openxmlformats.org/officeDocument/2006/relationships" xmlns:a="http://schemas.openxmlformats.org/drawingml/2006/main" r:embed="R90c6eecd648a450a">
             <a:alphaModFix amt="28000"/>
           </a:blip>
           <a:stretch xmlns:a="http://schemas.openxmlformats.org/drawingml/2006/main"/>
@@ -1664,7 +1664,7 @@
           <p:nvPr/>
         </p:nvPicPr>
         <p:blipFill rotWithShape="1">
-          <a:blip xmlns:r="http://schemas.openxmlformats.org/officeDocument/2006/relationships" xmlns:a="http://schemas.openxmlformats.org/drawingml/2006/main" r:embed="R3dc35d5e832c4675">
+          <a:blip xmlns:r="http://schemas.openxmlformats.org/officeDocument/2006/relationships" xmlns:a="http://schemas.openxmlformats.org/drawingml/2006/main" r:embed="Re6c303ed32564721">
             <a:alphaModFix amt="28000"/>
           </a:blip>
           <a:stretch xmlns:a="http://schemas.openxmlformats.org/drawingml/2006/main"/>
@@ -1899,7 +1899,7 @@
           <p:nvPr/>
         </p:nvPicPr>
         <p:blipFill rotWithShape="1">
-          <a:blip xmlns:r="http://schemas.openxmlformats.org/officeDocument/2006/relationships" xmlns:a="http://schemas.openxmlformats.org/drawingml/2006/main" r:embed="R5545eb9030bb4d9a">
+          <a:blip xmlns:r="http://schemas.openxmlformats.org/officeDocument/2006/relationships" xmlns:a="http://schemas.openxmlformats.org/drawingml/2006/main" r:embed="R6e77c7e0a0e84527">
             <a:alphaModFix amt="28000"/>
           </a:blip>
           <a:stretch xmlns:a="http://schemas.openxmlformats.org/drawingml/2006/main"/>
@@ -2176,7 +2176,7 @@
           <p:nvPr/>
         </p:nvPicPr>
         <p:blipFill rotWithShape="1">
-          <a:blip xmlns:r="http://schemas.openxmlformats.org/officeDocument/2006/relationships" xmlns:a="http://schemas.openxmlformats.org/drawingml/2006/main" r:embed="R22f16ab145f74a12">
+          <a:blip xmlns:r="http://schemas.openxmlformats.org/officeDocument/2006/relationships" xmlns:a="http://schemas.openxmlformats.org/drawingml/2006/main" r:embed="R1dc57fd1a4f040fc">
             <a:alphaModFix amt="28000"/>
           </a:blip>
           <a:stretch xmlns:a="http://schemas.openxmlformats.org/drawingml/2006/main"/>
@@ -2451,7 +2451,7 @@
           <p:nvPr/>
         </p:nvPicPr>
         <p:blipFill rotWithShape="1">
-          <a:blip xmlns:r="http://schemas.openxmlformats.org/officeDocument/2006/relationships" xmlns:a="http://schemas.openxmlformats.org/drawingml/2006/main" r:embed="Rde14d742eada46f5">
+          <a:blip xmlns:r="http://schemas.openxmlformats.org/officeDocument/2006/relationships" xmlns:a="http://schemas.openxmlformats.org/drawingml/2006/main" r:embed="R0f5c21dc11d444f8">
             <a:alphaModFix amt="28000"/>
           </a:blip>
           <a:stretch xmlns:a="http://schemas.openxmlformats.org/drawingml/2006/main"/>
@@ -2875,7 +2875,7 @@
           <p:nvPr/>
         </p:nvPicPr>
         <p:blipFill rotWithShape="1">
-          <a:blip xmlns:r="http://schemas.openxmlformats.org/officeDocument/2006/relationships" xmlns:a="http://schemas.openxmlformats.org/drawingml/2006/main" r:embed="R455472a57e034453">
+          <a:blip xmlns:r="http://schemas.openxmlformats.org/officeDocument/2006/relationships" xmlns:a="http://schemas.openxmlformats.org/drawingml/2006/main" r:embed="R09b6f34c34b543d3">
             <a:alphaModFix amt="28000"/>
           </a:blip>
           <a:stretch xmlns:a="http://schemas.openxmlformats.org/drawingml/2006/main"/>
@@ -3016,7 +3016,7 @@
           <p:nvPr/>
         </p:nvPicPr>
         <p:blipFill rotWithShape="1">
-          <a:blip xmlns:r="http://schemas.openxmlformats.org/officeDocument/2006/relationships" xmlns:a="http://schemas.openxmlformats.org/drawingml/2006/main" r:embed="R24fc5abe078a4689">
+          <a:blip xmlns:r="http://schemas.openxmlformats.org/officeDocument/2006/relationships" xmlns:a="http://schemas.openxmlformats.org/drawingml/2006/main" r:embed="R8d05ef42cc6344b0">
             <a:alphaModFix amt="28000"/>
           </a:blip>
           <a:stretch xmlns:a="http://schemas.openxmlformats.org/drawingml/2006/main"/>
@@ -3130,7 +3130,7 @@
           <p:nvPr/>
         </p:nvPicPr>
         <p:blipFill rotWithShape="1">
-          <a:blip xmlns:r="http://schemas.openxmlformats.org/officeDocument/2006/relationships" xmlns:a="http://schemas.openxmlformats.org/drawingml/2006/main" r:embed="Rf8f14943a93c46db">
+          <a:blip xmlns:r="http://schemas.openxmlformats.org/officeDocument/2006/relationships" xmlns:a="http://schemas.openxmlformats.org/drawingml/2006/main" r:embed="R9411a7d18f1c4c73">
             <a:alphaModFix amt="28000"/>
           </a:blip>
           <a:stretch xmlns:a="http://schemas.openxmlformats.org/drawingml/2006/main"/>
@@ -3457,7 +3457,7 @@
           <p:nvPr/>
         </p:nvPicPr>
         <p:blipFill rotWithShape="1">
-          <a:blip xmlns:r="http://schemas.openxmlformats.org/officeDocument/2006/relationships" xmlns:a="http://schemas.openxmlformats.org/drawingml/2006/main" r:embed="Rbbc80a5db4374344">
+          <a:blip xmlns:r="http://schemas.openxmlformats.org/officeDocument/2006/relationships" xmlns:a="http://schemas.openxmlformats.org/drawingml/2006/main" r:embed="R68afb17275654a23">
             <a:alphaModFix amt="28000"/>
           </a:blip>
           <a:stretch xmlns:a="http://schemas.openxmlformats.org/drawingml/2006/main"/>
@@ -3745,7 +3745,7 @@
           <p:nvPr/>
         </p:nvPicPr>
         <p:blipFill rotWithShape="1">
-          <a:blip xmlns:r="http://schemas.openxmlformats.org/officeDocument/2006/relationships" xmlns:a="http://schemas.openxmlformats.org/drawingml/2006/main" r:embed="R608400ae280b4421">
+          <a:blip xmlns:r="http://schemas.openxmlformats.org/officeDocument/2006/relationships" xmlns:a="http://schemas.openxmlformats.org/drawingml/2006/main" r:embed="R36cdc280e6cf4cf7">
             <a:alphaModFix amt="28000"/>
           </a:blip>
           <a:stretch xmlns:a="http://schemas.openxmlformats.org/drawingml/2006/main"/>
@@ -3982,17 +3982,17 @@
   </p:cSld>
   <p:clrMap bg1="lt1" tx1="dk1" bg2="lt2" tx2="dk2" accent1="accent1" accent2="accent2" accent3="accent3" accent4="accent4" accent5="accent5" accent6="accent6" hlink="hlink" folHlink="folHlink"/>
   <p:sldLayoutIdLst>
-    <p:sldLayoutId xmlns:r="http://schemas.openxmlformats.org/officeDocument/2006/relationships" id="2147483649" r:id="Rf7b0676a46424894"/>
-    <p:sldLayoutId xmlns:r="http://schemas.openxmlformats.org/officeDocument/2006/relationships" id="2147483650" r:id="Ra2ea94bcdc244518"/>
-    <p:sldLayoutId xmlns:r="http://schemas.openxmlformats.org/officeDocument/2006/relationships" id="2147483651" r:id="Rc48585fba9464793"/>
-    <p:sldLayoutId xmlns:r="http://schemas.openxmlformats.org/officeDocument/2006/relationships" id="2147483652" r:id="R385c3827de2c4b15"/>
-    <p:sldLayoutId xmlns:r="http://schemas.openxmlformats.org/officeDocument/2006/relationships" id="2147483653" r:id="R670d2a7b29d64698"/>
-    <p:sldLayoutId xmlns:r="http://schemas.openxmlformats.org/officeDocument/2006/relationships" id="2147483654" r:id="Rd2b6b23e06cd4336"/>
-    <p:sldLayoutId xmlns:r="http://schemas.openxmlformats.org/officeDocument/2006/relationships" id="2147483655" r:id="R88bfef294cd54756"/>
-    <p:sldLayoutId xmlns:r="http://schemas.openxmlformats.org/officeDocument/2006/relationships" id="2147483656" r:id="R761a4a75af3a4d9f"/>
-    <p:sldLayoutId xmlns:r="http://schemas.openxmlformats.org/officeDocument/2006/relationships" id="2147483657" r:id="R7f625ddba40547c2"/>
-    <p:sldLayoutId xmlns:r="http://schemas.openxmlformats.org/officeDocument/2006/relationships" id="2147483658" r:id="R935f7dfc4e654472"/>
-    <p:sldLayoutId xmlns:r="http://schemas.openxmlformats.org/officeDocument/2006/relationships" id="2147483659" r:id="R24fc77b98d9f461b"/>
+    <p:sldLayoutId xmlns:r="http://schemas.openxmlformats.org/officeDocument/2006/relationships" id="2147483649" r:id="R695e1a8aa9b04567"/>
+    <p:sldLayoutId xmlns:r="http://schemas.openxmlformats.org/officeDocument/2006/relationships" id="2147483650" r:id="Rd78b30f5378d4414"/>
+    <p:sldLayoutId xmlns:r="http://schemas.openxmlformats.org/officeDocument/2006/relationships" id="2147483651" r:id="Rfa9e0166f46a4ef7"/>
+    <p:sldLayoutId xmlns:r="http://schemas.openxmlformats.org/officeDocument/2006/relationships" id="2147483652" r:id="R706725b20e494931"/>
+    <p:sldLayoutId xmlns:r="http://schemas.openxmlformats.org/officeDocument/2006/relationships" id="2147483653" r:id="Rbb4b9b3618794e15"/>
+    <p:sldLayoutId xmlns:r="http://schemas.openxmlformats.org/officeDocument/2006/relationships" id="2147483654" r:id="R983979dfb3e046e4"/>
+    <p:sldLayoutId xmlns:r="http://schemas.openxmlformats.org/officeDocument/2006/relationships" id="2147483655" r:id="R94baccf9b9c44f3f"/>
+    <p:sldLayoutId xmlns:r="http://schemas.openxmlformats.org/officeDocument/2006/relationships" id="2147483656" r:id="R9b057e3d5e4a464d"/>
+    <p:sldLayoutId xmlns:r="http://schemas.openxmlformats.org/officeDocument/2006/relationships" id="2147483657" r:id="R94872e0799dd4d31"/>
+    <p:sldLayoutId xmlns:r="http://schemas.openxmlformats.org/officeDocument/2006/relationships" id="2147483658" r:id="Rb38af5138cb641af"/>
+    <p:sldLayoutId xmlns:r="http://schemas.openxmlformats.org/officeDocument/2006/relationships" id="2147483659" r:id="Rbd79111a78514590"/>
   </p:sldLayoutIdLst>
   <p:hf hdr="0" ftr="0" dt="0"/>
   <p:txStyles>
@@ -7593,18 +7593,21 @@
                 <a:ea typeface="Calibri"/>
                 <a:cs typeface="Calibri"/>
               </a:rPr>
-              <a:t>Change the second input so the user adds members instead of replacing the total. Test row 2 and add 2; </a:t>
-            </a:r>
-            <a:r>
-              <a:rPr sz="2400" b="0">
-                <a:solidFill>
-                  <a:srgbClr val="067D17"/>
-                </a:solidFill>
-                <a:latin typeface="JetBrains Mono"/>
-                <a:ea typeface="JetBrains Mono"/>
-                <a:cs typeface="JetBrains Mono"/>
-              </a:rPr>
-              <a:t>"Code"</a:t>
+              <a:t>Change the example's second input so it asks how many members to add, stored in </a:t>
+            </a:r>
+            <a:r>
+              <a:rPr sz="2050" b="0">
+                <a:solidFill>
+                  <a:srgbClr val="6A1B9A"/>
+                </a:solidFill>
+                <a:highlight>
+                  <a:srgbClr val="ECEAF4"/>
+                </a:highlight>
+                <a:latin typeface="JetBrains Mono"/>
+                <a:ea typeface="JetBrains Mono"/>
+                <a:cs typeface="JetBrains Mono"/>
+              </a:rPr>
+              <a:t> members_to_add </a:t>
             </a:r>
             <a:r>
               <a:rPr sz="2400" b="0">
@@ -7615,7 +7618,29 @@
                 <a:ea typeface="Calibri"/>
                 <a:cs typeface="Calibri"/>
               </a:rPr>
-              <a:t> should have 17 members and the other records should stay unchanged.</a:t>
+              <a:t>. Add it to the selected row's member count instead of replacing it. For example, row 2 and 2 display </a:t>
+            </a:r>
+            <a:r>
+              <a:rPr sz="2050" b="0">
+                <a:solidFill>
+                  <a:srgbClr val="067D17"/>
+                </a:solidFill>
+                <a:latin typeface="JetBrains Mono"/>
+                <a:ea typeface="JetBrains Mono"/>
+                <a:cs typeface="JetBrains Mono"/>
+              </a:rPr>
+              <a:t>"Updated record: ['Code', 17]"</a:t>
+            </a:r>
+            <a:r>
+              <a:rPr sz="2400" b="0">
+                <a:solidFill>
+                  <a:srgbClr val="080808"/>
+                </a:solidFill>
+                <a:latin typeface="Calibri"/>
+                <a:ea typeface="Calibri"/>
+                <a:cs typeface="Calibri"/>
+              </a:rPr>
+              <a:t>.</a:t>
             </a:r>
           </a:p>
         </p:txBody>
@@ -8351,7 +8376,7 @@
         </p:spPr>
         <p:txBody>
           <a:bodyPr xmlns:a="http://schemas.openxmlformats.org/drawingml/2006/main">
-            <a:normAutofit fontScale="87835"/>
+            <a:normAutofit fontScale="100000"/>
           </a:bodyPr>
           <a:lstStyle xmlns:a="http://schemas.openxmlformats.org/drawingml/2006/main"/>
           <a:p xmlns:a="http://schemas.openxmlformats.org/drawingml/2006/main">
@@ -8370,10 +8395,10 @@
                 <a:ea typeface="Calibri"/>
                 <a:cs typeface="Calibri"/>
               </a:rPr>
-              <a:t>Ask for a row from 0 to 2 and store it in [row]. Display </a:t>
-            </a:r>
-            <a:r>
-              <a:rPr sz="2400" b="0">
+              <a:t>Change the example so it replaces a whole record. Display the chosen row after </a:t>
+            </a:r>
+            <a:r>
+              <a:rPr sz="2050" b="0">
                 <a:solidFill>
                   <a:srgbClr val="067D17"/>
                 </a:solidFill>
@@ -8392,18 +8417,21 @@
                 <a:ea typeface="Calibri"/>
                 <a:cs typeface="Calibri"/>
               </a:rPr>
-              <a:t> followed by [clubs][row]. Ask for a new club name and member count and store them in [new_name] and [new_members]. Update both cells in the selected row, then display </a:t>
-            </a:r>
-            <a:r>
-              <a:rPr sz="2400" b="0">
-                <a:solidFill>
-                  <a:srgbClr val="067D17"/>
-                </a:solidFill>
-                <a:latin typeface="JetBrains Mono"/>
-                <a:ea typeface="JetBrains Mono"/>
-                <a:cs typeface="JetBrains Mono"/>
-              </a:rPr>
-              <a:t>"After:"</a:t>
+              <a:t>, ask for </a:t>
+            </a:r>
+            <a:r>
+              <a:rPr sz="2050" b="0">
+                <a:solidFill>
+                  <a:srgbClr val="6A1B9A"/>
+                </a:solidFill>
+                <a:highlight>
+                  <a:srgbClr val="ECEAF4"/>
+                </a:highlight>
+                <a:latin typeface="JetBrains Mono"/>
+                <a:ea typeface="JetBrains Mono"/>
+                <a:cs typeface="JetBrains Mono"/>
+              </a:rPr>
+              <a:t> new_name </a:t>
             </a:r>
             <a:r>
               <a:rPr sz="2400" b="0">
@@ -8414,18 +8442,21 @@
                 <a:ea typeface="Calibri"/>
                 <a:cs typeface="Calibri"/>
               </a:rPr>
-              <a:t> followed by the updated row. Test row 1, </a:t>
-            </a:r>
-            <a:r>
-              <a:rPr sz="2400" b="0">
-                <a:solidFill>
-                  <a:srgbClr val="067D17"/>
-                </a:solidFill>
-                <a:latin typeface="JetBrains Mono"/>
-                <a:ea typeface="JetBrains Mono"/>
-                <a:cs typeface="JetBrains Mono"/>
-              </a:rPr>
-              <a:t>"Robotics"</a:t>
+              <a:t> and </a:t>
+            </a:r>
+            <a:r>
+              <a:rPr sz="2050" b="0">
+                <a:solidFill>
+                  <a:srgbClr val="6A1B9A"/>
+                </a:solidFill>
+                <a:highlight>
+                  <a:srgbClr val="ECEAF4"/>
+                </a:highlight>
+                <a:latin typeface="JetBrains Mono"/>
+                <a:ea typeface="JetBrains Mono"/>
+                <a:cs typeface="JetBrains Mono"/>
+              </a:rPr>
+              <a:t> new_members </a:t>
             </a:r>
             <a:r>
               <a:rPr sz="2400" b="0">
@@ -8436,10 +8467,10 @@
                 <a:ea typeface="Calibri"/>
                 <a:cs typeface="Calibri"/>
               </a:rPr>
-              <a:t> and 22; display </a:t>
-            </a:r>
-            <a:r>
-              <a:rPr sz="2400" b="0">
+              <a:t>, update both values, then display the row after </a:t>
+            </a:r>
+            <a:r>
+              <a:rPr sz="2050" b="0">
                 <a:solidFill>
                   <a:srgbClr val="067D17"/>
                 </a:solidFill>
@@ -8447,7 +8478,7 @@
                 <a:ea typeface="JetBrains Mono"/>
                 <a:cs typeface="JetBrains Mono"/>
               </a:rPr>
-              <a:t>"Before: ['Chess', 18]"</a:t>
+              <a:t>"After:"</a:t>
             </a:r>
             <a:r>
               <a:rPr sz="2400" b="0">
@@ -8458,10 +8489,32 @@
                 <a:ea typeface="Calibri"/>
                 <a:cs typeface="Calibri"/>
               </a:rPr>
-              <a:t> and </a:t>
+              <a:t>. For example, row 1, </a:t>
+            </a:r>
+            <a:r>
+              <a:rPr sz="2050" b="0">
+                <a:solidFill>
+                  <a:srgbClr val="067D17"/>
+                </a:solidFill>
+                <a:latin typeface="JetBrains Mono"/>
+                <a:ea typeface="JetBrains Mono"/>
+                <a:cs typeface="JetBrains Mono"/>
+              </a:rPr>
+              <a:t>"Robotics"</a:t>
             </a:r>
             <a:r>
               <a:rPr sz="2400" b="0">
+                <a:solidFill>
+                  <a:srgbClr val="080808"/>
+                </a:solidFill>
+                <a:latin typeface="Calibri"/>
+                <a:ea typeface="Calibri"/>
+                <a:cs typeface="Calibri"/>
+              </a:rPr>
+              <a:t> and 22 display </a:t>
+            </a:r>
+            <a:r>
+              <a:rPr sz="2050" b="0">
                 <a:solidFill>
                   <a:srgbClr val="067D17"/>
                 </a:solidFill>
@@ -9216,7 +9269,7 @@
         </p:spPr>
         <p:txBody>
           <a:bodyPr xmlns:a="http://schemas.openxmlformats.org/drawingml/2006/main">
-            <a:normAutofit fontScale="88445"/>
+            <a:normAutofit fontScale="100000"/>
           </a:bodyPr>
           <a:lstStyle xmlns:a="http://schemas.openxmlformats.org/drawingml/2006/main"/>
           <a:p xmlns:a="http://schemas.openxmlformats.org/drawingml/2006/main">
@@ -9235,18 +9288,18 @@
                 <a:ea typeface="Calibri"/>
                 <a:cs typeface="Calibri"/>
               </a:rPr>
-              <a:t>Store the rows [</a:t>
-            </a:r>
-            <a:r>
-              <a:rPr sz="2400" b="0">
-                <a:solidFill>
-                  <a:srgbClr val="067D17"/>
-                </a:solidFill>
-                <a:latin typeface="JetBrains Mono"/>
-                <a:ea typeface="JetBrains Mono"/>
-                <a:cs typeface="JetBrains Mono"/>
-              </a:rPr>
-              <a:t>'Pens'</a:t>
+              <a:t>Create a 2D </a:t>
+            </a:r>
+            <a:r>
+              <a:rPr sz="2050" b="0">
+                <a:solidFill>
+                  <a:srgbClr val="1750EB"/>
+                </a:solidFill>
+                <a:latin typeface="JetBrains Mono"/>
+                <a:ea typeface="JetBrains Mono"/>
+                <a:cs typeface="JetBrains Mono"/>
+              </a:rPr>
+              <a:t>list</a:t>
             </a:r>
             <a:r>
               <a:rPr sz="2400" b="0">
@@ -9257,18 +9310,21 @@
                 <a:ea typeface="Calibri"/>
                 <a:cs typeface="Calibri"/>
               </a:rPr>
-              <a:t>, 10], [</a:t>
-            </a:r>
-            <a:r>
-              <a:rPr sz="2400" b="0">
-                <a:solidFill>
-                  <a:srgbClr val="067D17"/>
-                </a:solidFill>
-                <a:latin typeface="JetBrains Mono"/>
-                <a:ea typeface="JetBrains Mono"/>
-                <a:cs typeface="JetBrains Mono"/>
-              </a:rPr>
-              <a:t>'Books'</a:t>
+              <a:t> called </a:t>
+            </a:r>
+            <a:r>
+              <a:rPr sz="2050" b="0">
+                <a:solidFill>
+                  <a:srgbClr val="6A1B9A"/>
+                </a:solidFill>
+                <a:highlight>
+                  <a:srgbClr val="ECEAF4"/>
+                </a:highlight>
+                <a:latin typeface="JetBrains Mono"/>
+                <a:ea typeface="JetBrains Mono"/>
+                <a:cs typeface="JetBrains Mono"/>
+              </a:rPr>
+              <a:t> stock </a:t>
             </a:r>
             <a:r>
               <a:rPr sz="2400" b="0">
@@ -9279,10 +9335,10 @@
                 <a:ea typeface="Calibri"/>
                 <a:cs typeface="Calibri"/>
               </a:rPr>
-              <a:t>, 6] and [</a:t>
-            </a:r>
-            <a:r>
-              <a:rPr sz="2400" b="0">
+              <a:t> with rows [</a:t>
+            </a:r>
+            <a:r>
+              <a:rPr sz="2050" b="0">
                 <a:solidFill>
                   <a:srgbClr val="067D17"/>
                 </a:solidFill>
@@ -9290,7 +9346,7 @@
                 <a:ea typeface="JetBrains Mono"/>
                 <a:cs typeface="JetBrains Mono"/>
               </a:rPr>
-              <a:t>'Tape'</a:t>
+              <a:t>"Pens"</a:t>
             </a:r>
             <a:r>
               <a:rPr sz="2400" b="0">
@@ -9301,10 +9357,10 @@
                 <a:ea typeface="Calibri"/>
                 <a:cs typeface="Calibri"/>
               </a:rPr>
-              <a:t>, 4] in [stock]. Ask for a row from 0 to 2 and store it in [row]. Ask for a delivery amount and store it in [delivery], then add [delivery] to the quantity at [stock][row][1]. Display the updated row followed by every item name and quantity. Test row 2 and delivery 3; the updated row must be [</a:t>
-            </a:r>
-            <a:r>
-              <a:rPr sz="2400" b="0">
+              <a:t>, 10], [</a:t>
+            </a:r>
+            <a:r>
+              <a:rPr sz="2050" b="0">
                 <a:solidFill>
                   <a:srgbClr val="067D17"/>
                 </a:solidFill>
@@ -9312,7 +9368,7 @@
                 <a:ea typeface="JetBrains Mono"/>
                 <a:cs typeface="JetBrains Mono"/>
               </a:rPr>
-              <a:t>'Tape'</a:t>
+              <a:t>"Books"</a:t>
             </a:r>
             <a:r>
               <a:rPr sz="2400" b="0">
@@ -9323,7 +9379,29 @@
                 <a:ea typeface="Calibri"/>
                 <a:cs typeface="Calibri"/>
               </a:rPr>
-              <a:t>, 7].</a:t>
+              <a:t>, 6] and [</a:t>
+            </a:r>
+            <a:r>
+              <a:rPr sz="2050" b="0">
+                <a:solidFill>
+                  <a:srgbClr val="067D17"/>
+                </a:solidFill>
+                <a:latin typeface="JetBrains Mono"/>
+                <a:ea typeface="JetBrains Mono"/>
+                <a:cs typeface="JetBrains Mono"/>
+              </a:rPr>
+              <a:t>"Tape"</a:t>
+            </a:r>
+            <a:r>
+              <a:rPr sz="2400" b="0">
+                <a:solidFill>
+                  <a:srgbClr val="080808"/>
+                </a:solidFill>
+                <a:latin typeface="Calibri"/>
+                <a:ea typeface="Calibri"/>
+                <a:cs typeface="Calibri"/>
+              </a:rPr>
+              <a:t>, 4]. Ask for a row, a delivery amount and a number sold. Add the delivery and subtract the sales from that row's quantity. Display the updated row, then every item and quantity on separate lines.</a:t>
             </a:r>
           </a:p>
         </p:txBody>

--- a/Mapped Curriculum Lessons/Grade 8/Lesson 29 - Updating 2D List Cells/Updating 2D List Cells - Slides.pptx
+++ b/Mapped Curriculum Lessons/Grade 8/Lesson 29 - Updating 2D List Cells/Updating 2D List Cells - Slides.pptx
@@ -2,28 +2,28 @@
 <file path=ppt/presentation.xml><?xml version="1.0" encoding="utf-8"?>
 <p:presentation xmlns:p="http://schemas.openxmlformats.org/presentationml/2006/main" embedTrueTypeFonts="1" saveSubsetFonts="0">
   <p:sldMasterIdLst>
-    <p:sldMasterId xmlns:r="http://schemas.openxmlformats.org/officeDocument/2006/relationships" id="2147483648" r:id="R049c771542054e0e"/>
+    <p:sldMasterId xmlns:r="http://schemas.openxmlformats.org/officeDocument/2006/relationships" id="2147483648" r:id="Rbbb1bd27d0004e10"/>
   </p:sldMasterIdLst>
   <p:notesMasterIdLst>
-    <p:notesMasterId xmlns:r="http://schemas.openxmlformats.org/officeDocument/2006/relationships" r:id="Rc5f100719c904f12"/>
+    <p:notesMasterId xmlns:r="http://schemas.openxmlformats.org/officeDocument/2006/relationships" r:id="Rf857603feb874316"/>
   </p:notesMasterIdLst>
   <p:sldIdLst>
-    <p:sldId xmlns:r="http://schemas.openxmlformats.org/officeDocument/2006/relationships" id="256" r:id="Rda2b749c3b8347c2"/>
-    <p:sldId xmlns:r="http://schemas.openxmlformats.org/officeDocument/2006/relationships" id="257" r:id="R52c6d753e0af4745"/>
-    <p:sldId xmlns:r="http://schemas.openxmlformats.org/officeDocument/2006/relationships" id="258" r:id="R7015807dd9094c21"/>
-    <p:sldId xmlns:r="http://schemas.openxmlformats.org/officeDocument/2006/relationships" id="259" r:id="Rd3af26115b524b89"/>
-    <p:sldId xmlns:r="http://schemas.openxmlformats.org/officeDocument/2006/relationships" id="260" r:id="R67b6c2ceb0a2438f"/>
-    <p:sldId xmlns:r="http://schemas.openxmlformats.org/officeDocument/2006/relationships" id="261" r:id="Re99ede8a468741ac"/>
-    <p:sldId xmlns:r="http://schemas.openxmlformats.org/officeDocument/2006/relationships" id="262" r:id="R8ad727c7f3234ea2"/>
-    <p:sldId xmlns:r="http://schemas.openxmlformats.org/officeDocument/2006/relationships" id="263" r:id="R6af1b18c1dc24d11"/>
-    <p:sldId xmlns:r="http://schemas.openxmlformats.org/officeDocument/2006/relationships" id="264" r:id="Rbbc3139c87b04ad9"/>
+    <p:sldId xmlns:r="http://schemas.openxmlformats.org/officeDocument/2006/relationships" id="256" r:id="Rb0d22f82068445e8"/>
+    <p:sldId xmlns:r="http://schemas.openxmlformats.org/officeDocument/2006/relationships" id="257" r:id="R41d6963ade9b43d0"/>
+    <p:sldId xmlns:r="http://schemas.openxmlformats.org/officeDocument/2006/relationships" id="258" r:id="Raa0115ce558943b6"/>
+    <p:sldId xmlns:r="http://schemas.openxmlformats.org/officeDocument/2006/relationships" id="259" r:id="Rfcf9c3677b6b429f"/>
+    <p:sldId xmlns:r="http://schemas.openxmlformats.org/officeDocument/2006/relationships" id="260" r:id="Rce0d5c1716284307"/>
+    <p:sldId xmlns:r="http://schemas.openxmlformats.org/officeDocument/2006/relationships" id="261" r:id="R1dd882ff32bc4771"/>
+    <p:sldId xmlns:r="http://schemas.openxmlformats.org/officeDocument/2006/relationships" id="262" r:id="R2eb213f6fa3b48a0"/>
+    <p:sldId xmlns:r="http://schemas.openxmlformats.org/officeDocument/2006/relationships" id="263" r:id="R231b3088cf6b4627"/>
+    <p:sldId xmlns:r="http://schemas.openxmlformats.org/officeDocument/2006/relationships" id="264" r:id="Rea9db57752a943cd"/>
   </p:sldIdLst>
   <p:sldSz cx="12192000" cy="6858000"/>
   <p:notesSz cx="6858000" cy="9144000"/>
   <p:embeddedFontLst>
     <p:embeddedFont>
       <p:font typeface="JetBrains Mono"/>
-      <p:regular xmlns:r="http://schemas.openxmlformats.org/officeDocument/2006/relationships" r:id="Rb1f494eab7314c4c"/>
+      <p:regular xmlns:r="http://schemas.openxmlformats.org/officeDocument/2006/relationships" r:id="Rd77b49845c3c4db1"/>
     </p:embeddedFont>
   </p:embeddedFontLst>
 </p:presentation>
@@ -1071,7 +1071,7 @@
           <p:nvPr/>
         </p:nvPicPr>
         <p:blipFill rotWithShape="1">
-          <a:blip xmlns:r="http://schemas.openxmlformats.org/officeDocument/2006/relationships" xmlns:a="http://schemas.openxmlformats.org/drawingml/2006/main" r:embed="Rf637f5d17caf4885"/>
+          <a:blip xmlns:r="http://schemas.openxmlformats.org/officeDocument/2006/relationships" xmlns:a="http://schemas.openxmlformats.org/drawingml/2006/main" r:embed="R77f46d3b87ce4c13"/>
           <a:stretch xmlns:a="http://schemas.openxmlformats.org/drawingml/2006/main"/>
         </p:blipFill>
         <p:spPr>
@@ -1451,7 +1451,7 @@
           <p:nvPr/>
         </p:nvPicPr>
         <p:blipFill rotWithShape="1">
-          <a:blip xmlns:r="http://schemas.openxmlformats.org/officeDocument/2006/relationships" xmlns:a="http://schemas.openxmlformats.org/drawingml/2006/main" r:embed="R90c6eecd648a450a">
+          <a:blip xmlns:r="http://schemas.openxmlformats.org/officeDocument/2006/relationships" xmlns:a="http://schemas.openxmlformats.org/drawingml/2006/main" r:embed="Rd489fd657357432b">
             <a:alphaModFix amt="28000"/>
           </a:blip>
           <a:stretch xmlns:a="http://schemas.openxmlformats.org/drawingml/2006/main"/>
@@ -1664,7 +1664,7 @@
           <p:nvPr/>
         </p:nvPicPr>
         <p:blipFill rotWithShape="1">
-          <a:blip xmlns:r="http://schemas.openxmlformats.org/officeDocument/2006/relationships" xmlns:a="http://schemas.openxmlformats.org/drawingml/2006/main" r:embed="Re6c303ed32564721">
+          <a:blip xmlns:r="http://schemas.openxmlformats.org/officeDocument/2006/relationships" xmlns:a="http://schemas.openxmlformats.org/drawingml/2006/main" r:embed="Rda86dd77861b4cc5">
             <a:alphaModFix amt="28000"/>
           </a:blip>
           <a:stretch xmlns:a="http://schemas.openxmlformats.org/drawingml/2006/main"/>
@@ -1899,7 +1899,7 @@
           <p:nvPr/>
         </p:nvPicPr>
         <p:blipFill rotWithShape="1">
-          <a:blip xmlns:r="http://schemas.openxmlformats.org/officeDocument/2006/relationships" xmlns:a="http://schemas.openxmlformats.org/drawingml/2006/main" r:embed="R6e77c7e0a0e84527">
+          <a:blip xmlns:r="http://schemas.openxmlformats.org/officeDocument/2006/relationships" xmlns:a="http://schemas.openxmlformats.org/drawingml/2006/main" r:embed="Rc313fefb00c240a3">
             <a:alphaModFix amt="28000"/>
           </a:blip>
           <a:stretch xmlns:a="http://schemas.openxmlformats.org/drawingml/2006/main"/>
@@ -2176,7 +2176,7 @@
           <p:nvPr/>
         </p:nvPicPr>
         <p:blipFill rotWithShape="1">
-          <a:blip xmlns:r="http://schemas.openxmlformats.org/officeDocument/2006/relationships" xmlns:a="http://schemas.openxmlformats.org/drawingml/2006/main" r:embed="R1dc57fd1a4f040fc">
+          <a:blip xmlns:r="http://schemas.openxmlformats.org/officeDocument/2006/relationships" xmlns:a="http://schemas.openxmlformats.org/drawingml/2006/main" r:embed="R21b9ebdb7c164691">
             <a:alphaModFix amt="28000"/>
           </a:blip>
           <a:stretch xmlns:a="http://schemas.openxmlformats.org/drawingml/2006/main"/>
@@ -2451,7 +2451,7 @@
           <p:nvPr/>
         </p:nvPicPr>
         <p:blipFill rotWithShape="1">
-          <a:blip xmlns:r="http://schemas.openxmlformats.org/officeDocument/2006/relationships" xmlns:a="http://schemas.openxmlformats.org/drawingml/2006/main" r:embed="R0f5c21dc11d444f8">
+          <a:blip xmlns:r="http://schemas.openxmlformats.org/officeDocument/2006/relationships" xmlns:a="http://schemas.openxmlformats.org/drawingml/2006/main" r:embed="Ra2064519bf30491a">
             <a:alphaModFix amt="28000"/>
           </a:blip>
           <a:stretch xmlns:a="http://schemas.openxmlformats.org/drawingml/2006/main"/>
@@ -2875,7 +2875,7 @@
           <p:nvPr/>
         </p:nvPicPr>
         <p:blipFill rotWithShape="1">
-          <a:blip xmlns:r="http://schemas.openxmlformats.org/officeDocument/2006/relationships" xmlns:a="http://schemas.openxmlformats.org/drawingml/2006/main" r:embed="R09b6f34c34b543d3">
+          <a:blip xmlns:r="http://schemas.openxmlformats.org/officeDocument/2006/relationships" xmlns:a="http://schemas.openxmlformats.org/drawingml/2006/main" r:embed="Rcd21cab865874ffe">
             <a:alphaModFix amt="28000"/>
           </a:blip>
           <a:stretch xmlns:a="http://schemas.openxmlformats.org/drawingml/2006/main"/>
@@ -3016,7 +3016,7 @@
           <p:nvPr/>
         </p:nvPicPr>
         <p:blipFill rotWithShape="1">
-          <a:blip xmlns:r="http://schemas.openxmlformats.org/officeDocument/2006/relationships" xmlns:a="http://schemas.openxmlformats.org/drawingml/2006/main" r:embed="R8d05ef42cc6344b0">
+          <a:blip xmlns:r="http://schemas.openxmlformats.org/officeDocument/2006/relationships" xmlns:a="http://schemas.openxmlformats.org/drawingml/2006/main" r:embed="R6e16e7486fda41a8">
             <a:alphaModFix amt="28000"/>
           </a:blip>
           <a:stretch xmlns:a="http://schemas.openxmlformats.org/drawingml/2006/main"/>
@@ -3130,7 +3130,7 @@
           <p:nvPr/>
         </p:nvPicPr>
         <p:blipFill rotWithShape="1">
-          <a:blip xmlns:r="http://schemas.openxmlformats.org/officeDocument/2006/relationships" xmlns:a="http://schemas.openxmlformats.org/drawingml/2006/main" r:embed="R9411a7d18f1c4c73">
+          <a:blip xmlns:r="http://schemas.openxmlformats.org/officeDocument/2006/relationships" xmlns:a="http://schemas.openxmlformats.org/drawingml/2006/main" r:embed="R336caaa8591d4a32">
             <a:alphaModFix amt="28000"/>
           </a:blip>
           <a:stretch xmlns:a="http://schemas.openxmlformats.org/drawingml/2006/main"/>
@@ -3457,7 +3457,7 @@
           <p:nvPr/>
         </p:nvPicPr>
         <p:blipFill rotWithShape="1">
-          <a:blip xmlns:r="http://schemas.openxmlformats.org/officeDocument/2006/relationships" xmlns:a="http://schemas.openxmlformats.org/drawingml/2006/main" r:embed="R68afb17275654a23">
+          <a:blip xmlns:r="http://schemas.openxmlformats.org/officeDocument/2006/relationships" xmlns:a="http://schemas.openxmlformats.org/drawingml/2006/main" r:embed="R2b127b10f0bc403b">
             <a:alphaModFix amt="28000"/>
           </a:blip>
           <a:stretch xmlns:a="http://schemas.openxmlformats.org/drawingml/2006/main"/>
@@ -3745,7 +3745,7 @@
           <p:nvPr/>
         </p:nvPicPr>
         <p:blipFill rotWithShape="1">
-          <a:blip xmlns:r="http://schemas.openxmlformats.org/officeDocument/2006/relationships" xmlns:a="http://schemas.openxmlformats.org/drawingml/2006/main" r:embed="R36cdc280e6cf4cf7">
+          <a:blip xmlns:r="http://schemas.openxmlformats.org/officeDocument/2006/relationships" xmlns:a="http://schemas.openxmlformats.org/drawingml/2006/main" r:embed="Rac11b5c4ea7540f2">
             <a:alphaModFix amt="28000"/>
           </a:blip>
           <a:stretch xmlns:a="http://schemas.openxmlformats.org/drawingml/2006/main"/>
@@ -3982,17 +3982,17 @@
   </p:cSld>
   <p:clrMap bg1="lt1" tx1="dk1" bg2="lt2" tx2="dk2" accent1="accent1" accent2="accent2" accent3="accent3" accent4="accent4" accent5="accent5" accent6="accent6" hlink="hlink" folHlink="folHlink"/>
   <p:sldLayoutIdLst>
-    <p:sldLayoutId xmlns:r="http://schemas.openxmlformats.org/officeDocument/2006/relationships" id="2147483649" r:id="R695e1a8aa9b04567"/>
-    <p:sldLayoutId xmlns:r="http://schemas.openxmlformats.org/officeDocument/2006/relationships" id="2147483650" r:id="Rd78b30f5378d4414"/>
-    <p:sldLayoutId xmlns:r="http://schemas.openxmlformats.org/officeDocument/2006/relationships" id="2147483651" r:id="Rfa9e0166f46a4ef7"/>
-    <p:sldLayoutId xmlns:r="http://schemas.openxmlformats.org/officeDocument/2006/relationships" id="2147483652" r:id="R706725b20e494931"/>
-    <p:sldLayoutId xmlns:r="http://schemas.openxmlformats.org/officeDocument/2006/relationships" id="2147483653" r:id="Rbb4b9b3618794e15"/>
-    <p:sldLayoutId xmlns:r="http://schemas.openxmlformats.org/officeDocument/2006/relationships" id="2147483654" r:id="R983979dfb3e046e4"/>
-    <p:sldLayoutId xmlns:r="http://schemas.openxmlformats.org/officeDocument/2006/relationships" id="2147483655" r:id="R94baccf9b9c44f3f"/>
-    <p:sldLayoutId xmlns:r="http://schemas.openxmlformats.org/officeDocument/2006/relationships" id="2147483656" r:id="R9b057e3d5e4a464d"/>
-    <p:sldLayoutId xmlns:r="http://schemas.openxmlformats.org/officeDocument/2006/relationships" id="2147483657" r:id="R94872e0799dd4d31"/>
-    <p:sldLayoutId xmlns:r="http://schemas.openxmlformats.org/officeDocument/2006/relationships" id="2147483658" r:id="Rb38af5138cb641af"/>
-    <p:sldLayoutId xmlns:r="http://schemas.openxmlformats.org/officeDocument/2006/relationships" id="2147483659" r:id="Rbd79111a78514590"/>
+    <p:sldLayoutId xmlns:r="http://schemas.openxmlformats.org/officeDocument/2006/relationships" id="2147483649" r:id="Rcf68e2e12ff045ee"/>
+    <p:sldLayoutId xmlns:r="http://schemas.openxmlformats.org/officeDocument/2006/relationships" id="2147483650" r:id="Rd1c4070d93e7427f"/>
+    <p:sldLayoutId xmlns:r="http://schemas.openxmlformats.org/officeDocument/2006/relationships" id="2147483651" r:id="Ra5421b36456b48fe"/>
+    <p:sldLayoutId xmlns:r="http://schemas.openxmlformats.org/officeDocument/2006/relationships" id="2147483652" r:id="R3674e7191e474e24"/>
+    <p:sldLayoutId xmlns:r="http://schemas.openxmlformats.org/officeDocument/2006/relationships" id="2147483653" r:id="Rda7e6cae35dc41fc"/>
+    <p:sldLayoutId xmlns:r="http://schemas.openxmlformats.org/officeDocument/2006/relationships" id="2147483654" r:id="Rc27f717ef98c41e2"/>
+    <p:sldLayoutId xmlns:r="http://schemas.openxmlformats.org/officeDocument/2006/relationships" id="2147483655" r:id="R65fdd3d8d5904e7d"/>
+    <p:sldLayoutId xmlns:r="http://schemas.openxmlformats.org/officeDocument/2006/relationships" id="2147483656" r:id="R39909034cbd34d96"/>
+    <p:sldLayoutId xmlns:r="http://schemas.openxmlformats.org/officeDocument/2006/relationships" id="2147483657" r:id="R3b75ff03994147dd"/>
+    <p:sldLayoutId xmlns:r="http://schemas.openxmlformats.org/officeDocument/2006/relationships" id="2147483658" r:id="Rbdf08cf2072c4cd5"/>
+    <p:sldLayoutId xmlns:r="http://schemas.openxmlformats.org/officeDocument/2006/relationships" id="2147483659" r:id="R9254b38263fe414a"/>
   </p:sldLayoutIdLst>
   <p:hf hdr="0" ftr="0" dt="0"/>
   <p:txStyles>

--- a/Mapped Curriculum Lessons/Grade 8/Lesson 29 - Updating 2D List Cells/Updating 2D List Cells - Slides.pptx
+++ b/Mapped Curriculum Lessons/Grade 8/Lesson 29 - Updating 2D List Cells/Updating 2D List Cells - Slides.pptx
@@ -2,28 +2,28 @@
 <file path=ppt/presentation.xml><?xml version="1.0" encoding="utf-8"?>
 <p:presentation xmlns:p="http://schemas.openxmlformats.org/presentationml/2006/main" embedTrueTypeFonts="1" saveSubsetFonts="0">
   <p:sldMasterIdLst>
-    <p:sldMasterId xmlns:r="http://schemas.openxmlformats.org/officeDocument/2006/relationships" id="2147483648" r:id="Rbbb1bd27d0004e10"/>
+    <p:sldMasterId xmlns:r="http://schemas.openxmlformats.org/officeDocument/2006/relationships" id="2147483648" r:id="R22efc46a4d714207"/>
   </p:sldMasterIdLst>
   <p:notesMasterIdLst>
-    <p:notesMasterId xmlns:r="http://schemas.openxmlformats.org/officeDocument/2006/relationships" r:id="Rf857603feb874316"/>
+    <p:notesMasterId xmlns:r="http://schemas.openxmlformats.org/officeDocument/2006/relationships" r:id="Rd2a7cfc599b74d6d"/>
   </p:notesMasterIdLst>
   <p:sldIdLst>
-    <p:sldId xmlns:r="http://schemas.openxmlformats.org/officeDocument/2006/relationships" id="256" r:id="Rb0d22f82068445e8"/>
-    <p:sldId xmlns:r="http://schemas.openxmlformats.org/officeDocument/2006/relationships" id="257" r:id="R41d6963ade9b43d0"/>
-    <p:sldId xmlns:r="http://schemas.openxmlformats.org/officeDocument/2006/relationships" id="258" r:id="Raa0115ce558943b6"/>
-    <p:sldId xmlns:r="http://schemas.openxmlformats.org/officeDocument/2006/relationships" id="259" r:id="Rfcf9c3677b6b429f"/>
-    <p:sldId xmlns:r="http://schemas.openxmlformats.org/officeDocument/2006/relationships" id="260" r:id="Rce0d5c1716284307"/>
-    <p:sldId xmlns:r="http://schemas.openxmlformats.org/officeDocument/2006/relationships" id="261" r:id="R1dd882ff32bc4771"/>
-    <p:sldId xmlns:r="http://schemas.openxmlformats.org/officeDocument/2006/relationships" id="262" r:id="R2eb213f6fa3b48a0"/>
-    <p:sldId xmlns:r="http://schemas.openxmlformats.org/officeDocument/2006/relationships" id="263" r:id="R231b3088cf6b4627"/>
-    <p:sldId xmlns:r="http://schemas.openxmlformats.org/officeDocument/2006/relationships" id="264" r:id="Rea9db57752a943cd"/>
+    <p:sldId xmlns:r="http://schemas.openxmlformats.org/officeDocument/2006/relationships" id="256" r:id="Rc6039f668e704fa4"/>
+    <p:sldId xmlns:r="http://schemas.openxmlformats.org/officeDocument/2006/relationships" id="257" r:id="Rc1ca232b5cb14606"/>
+    <p:sldId xmlns:r="http://schemas.openxmlformats.org/officeDocument/2006/relationships" id="258" r:id="R79c66e89e0204295"/>
+    <p:sldId xmlns:r="http://schemas.openxmlformats.org/officeDocument/2006/relationships" id="259" r:id="R0bc480471dac4141"/>
+    <p:sldId xmlns:r="http://schemas.openxmlformats.org/officeDocument/2006/relationships" id="260" r:id="Rbbbbd8f7adb3487e"/>
+    <p:sldId xmlns:r="http://schemas.openxmlformats.org/officeDocument/2006/relationships" id="261" r:id="R12216a7a070a4442"/>
+    <p:sldId xmlns:r="http://schemas.openxmlformats.org/officeDocument/2006/relationships" id="262" r:id="R1e57e4088f9743ec"/>
+    <p:sldId xmlns:r="http://schemas.openxmlformats.org/officeDocument/2006/relationships" id="263" r:id="Rf6c1a94019124d9f"/>
+    <p:sldId xmlns:r="http://schemas.openxmlformats.org/officeDocument/2006/relationships" id="264" r:id="R9db4c1464890417e"/>
   </p:sldIdLst>
   <p:sldSz cx="12192000" cy="6858000"/>
   <p:notesSz cx="6858000" cy="9144000"/>
   <p:embeddedFontLst>
     <p:embeddedFont>
       <p:font typeface="JetBrains Mono"/>
-      <p:regular xmlns:r="http://schemas.openxmlformats.org/officeDocument/2006/relationships" r:id="Rd77b49845c3c4db1"/>
+      <p:regular xmlns:r="http://schemas.openxmlformats.org/officeDocument/2006/relationships" r:id="R6f18dfa0757b4c7b"/>
     </p:embeddedFont>
   </p:embeddedFontLst>
 </p:presentation>
@@ -1071,7 +1071,7 @@
           <p:nvPr/>
         </p:nvPicPr>
         <p:blipFill rotWithShape="1">
-          <a:blip xmlns:r="http://schemas.openxmlformats.org/officeDocument/2006/relationships" xmlns:a="http://schemas.openxmlformats.org/drawingml/2006/main" r:embed="R77f46d3b87ce4c13"/>
+          <a:blip xmlns:r="http://schemas.openxmlformats.org/officeDocument/2006/relationships" xmlns:a="http://schemas.openxmlformats.org/drawingml/2006/main" r:embed="Rb42da4e4c10a4aba"/>
           <a:stretch xmlns:a="http://schemas.openxmlformats.org/drawingml/2006/main"/>
         </p:blipFill>
         <p:spPr>
@@ -1451,7 +1451,7 @@
           <p:nvPr/>
         </p:nvPicPr>
         <p:blipFill rotWithShape="1">
-          <a:blip xmlns:r="http://schemas.openxmlformats.org/officeDocument/2006/relationships" xmlns:a="http://schemas.openxmlformats.org/drawingml/2006/main" r:embed="Rd489fd657357432b">
+          <a:blip xmlns:r="http://schemas.openxmlformats.org/officeDocument/2006/relationships" xmlns:a="http://schemas.openxmlformats.org/drawingml/2006/main" r:embed="R7032edde825c4760">
             <a:alphaModFix amt="28000"/>
           </a:blip>
           <a:stretch xmlns:a="http://schemas.openxmlformats.org/drawingml/2006/main"/>
@@ -1664,7 +1664,7 @@
           <p:nvPr/>
         </p:nvPicPr>
         <p:blipFill rotWithShape="1">
-          <a:blip xmlns:r="http://schemas.openxmlformats.org/officeDocument/2006/relationships" xmlns:a="http://schemas.openxmlformats.org/drawingml/2006/main" r:embed="Rda86dd77861b4cc5">
+          <a:blip xmlns:r="http://schemas.openxmlformats.org/officeDocument/2006/relationships" xmlns:a="http://schemas.openxmlformats.org/drawingml/2006/main" r:embed="R4997285737e5404d">
             <a:alphaModFix amt="28000"/>
           </a:blip>
           <a:stretch xmlns:a="http://schemas.openxmlformats.org/drawingml/2006/main"/>
@@ -1899,7 +1899,7 @@
           <p:nvPr/>
         </p:nvPicPr>
         <p:blipFill rotWithShape="1">
-          <a:blip xmlns:r="http://schemas.openxmlformats.org/officeDocument/2006/relationships" xmlns:a="http://schemas.openxmlformats.org/drawingml/2006/main" r:embed="Rc313fefb00c240a3">
+          <a:blip xmlns:r="http://schemas.openxmlformats.org/officeDocument/2006/relationships" xmlns:a="http://schemas.openxmlformats.org/drawingml/2006/main" r:embed="R9a16e40908e544c8">
             <a:alphaModFix amt="28000"/>
           </a:blip>
           <a:stretch xmlns:a="http://schemas.openxmlformats.org/drawingml/2006/main"/>
@@ -2176,7 +2176,7 @@
           <p:nvPr/>
         </p:nvPicPr>
         <p:blipFill rotWithShape="1">
-          <a:blip xmlns:r="http://schemas.openxmlformats.org/officeDocument/2006/relationships" xmlns:a="http://schemas.openxmlformats.org/drawingml/2006/main" r:embed="R21b9ebdb7c164691">
+          <a:blip xmlns:r="http://schemas.openxmlformats.org/officeDocument/2006/relationships" xmlns:a="http://schemas.openxmlformats.org/drawingml/2006/main" r:embed="R7047a7b90d1c4913">
             <a:alphaModFix amt="28000"/>
           </a:blip>
           <a:stretch xmlns:a="http://schemas.openxmlformats.org/drawingml/2006/main"/>
@@ -2451,7 +2451,7 @@
           <p:nvPr/>
         </p:nvPicPr>
         <p:blipFill rotWithShape="1">
-          <a:blip xmlns:r="http://schemas.openxmlformats.org/officeDocument/2006/relationships" xmlns:a="http://schemas.openxmlformats.org/drawingml/2006/main" r:embed="Ra2064519bf30491a">
+          <a:blip xmlns:r="http://schemas.openxmlformats.org/officeDocument/2006/relationships" xmlns:a="http://schemas.openxmlformats.org/drawingml/2006/main" r:embed="R64c1e9d6ee5f40c1">
             <a:alphaModFix amt="28000"/>
           </a:blip>
           <a:stretch xmlns:a="http://schemas.openxmlformats.org/drawingml/2006/main"/>
@@ -2875,7 +2875,7 @@
           <p:nvPr/>
         </p:nvPicPr>
         <p:blipFill rotWithShape="1">
-          <a:blip xmlns:r="http://schemas.openxmlformats.org/officeDocument/2006/relationships" xmlns:a="http://schemas.openxmlformats.org/drawingml/2006/main" r:embed="Rcd21cab865874ffe">
+          <a:blip xmlns:r="http://schemas.openxmlformats.org/officeDocument/2006/relationships" xmlns:a="http://schemas.openxmlformats.org/drawingml/2006/main" r:embed="R1e814563db924d48">
             <a:alphaModFix amt="28000"/>
           </a:blip>
           <a:stretch xmlns:a="http://schemas.openxmlformats.org/drawingml/2006/main"/>
@@ -3016,7 +3016,7 @@
           <p:nvPr/>
         </p:nvPicPr>
         <p:blipFill rotWithShape="1">
-          <a:blip xmlns:r="http://schemas.openxmlformats.org/officeDocument/2006/relationships" xmlns:a="http://schemas.openxmlformats.org/drawingml/2006/main" r:embed="R6e16e7486fda41a8">
+          <a:blip xmlns:r="http://schemas.openxmlformats.org/officeDocument/2006/relationships" xmlns:a="http://schemas.openxmlformats.org/drawingml/2006/main" r:embed="R6b79488d45cc4cef">
             <a:alphaModFix amt="28000"/>
           </a:blip>
           <a:stretch xmlns:a="http://schemas.openxmlformats.org/drawingml/2006/main"/>
@@ -3130,7 +3130,7 @@
           <p:nvPr/>
         </p:nvPicPr>
         <p:blipFill rotWithShape="1">
-          <a:blip xmlns:r="http://schemas.openxmlformats.org/officeDocument/2006/relationships" xmlns:a="http://schemas.openxmlformats.org/drawingml/2006/main" r:embed="R336caaa8591d4a32">
+          <a:blip xmlns:r="http://schemas.openxmlformats.org/officeDocument/2006/relationships" xmlns:a="http://schemas.openxmlformats.org/drawingml/2006/main" r:embed="Re4475203fefb4e8c">
             <a:alphaModFix amt="28000"/>
           </a:blip>
           <a:stretch xmlns:a="http://schemas.openxmlformats.org/drawingml/2006/main"/>
@@ -3457,7 +3457,7 @@
           <p:nvPr/>
         </p:nvPicPr>
         <p:blipFill rotWithShape="1">
-          <a:blip xmlns:r="http://schemas.openxmlformats.org/officeDocument/2006/relationships" xmlns:a="http://schemas.openxmlformats.org/drawingml/2006/main" r:embed="R2b127b10f0bc403b">
+          <a:blip xmlns:r="http://schemas.openxmlformats.org/officeDocument/2006/relationships" xmlns:a="http://schemas.openxmlformats.org/drawingml/2006/main" r:embed="Rf13d0bc20db047e0">
             <a:alphaModFix amt="28000"/>
           </a:blip>
           <a:stretch xmlns:a="http://schemas.openxmlformats.org/drawingml/2006/main"/>
@@ -3745,7 +3745,7 @@
           <p:nvPr/>
         </p:nvPicPr>
         <p:blipFill rotWithShape="1">
-          <a:blip xmlns:r="http://schemas.openxmlformats.org/officeDocument/2006/relationships" xmlns:a="http://schemas.openxmlformats.org/drawingml/2006/main" r:embed="Rac11b5c4ea7540f2">
+          <a:blip xmlns:r="http://schemas.openxmlformats.org/officeDocument/2006/relationships" xmlns:a="http://schemas.openxmlformats.org/drawingml/2006/main" r:embed="Rb018c969d03a49a2">
             <a:alphaModFix amt="28000"/>
           </a:blip>
           <a:stretch xmlns:a="http://schemas.openxmlformats.org/drawingml/2006/main"/>
@@ -3982,17 +3982,17 @@
   </p:cSld>
   <p:clrMap bg1="lt1" tx1="dk1" bg2="lt2" tx2="dk2" accent1="accent1" accent2="accent2" accent3="accent3" accent4="accent4" accent5="accent5" accent6="accent6" hlink="hlink" folHlink="folHlink"/>
   <p:sldLayoutIdLst>
-    <p:sldLayoutId xmlns:r="http://schemas.openxmlformats.org/officeDocument/2006/relationships" id="2147483649" r:id="Rcf68e2e12ff045ee"/>
-    <p:sldLayoutId xmlns:r="http://schemas.openxmlformats.org/officeDocument/2006/relationships" id="2147483650" r:id="Rd1c4070d93e7427f"/>
-    <p:sldLayoutId xmlns:r="http://schemas.openxmlformats.org/officeDocument/2006/relationships" id="2147483651" r:id="Ra5421b36456b48fe"/>
-    <p:sldLayoutId xmlns:r="http://schemas.openxmlformats.org/officeDocument/2006/relationships" id="2147483652" r:id="R3674e7191e474e24"/>
-    <p:sldLayoutId xmlns:r="http://schemas.openxmlformats.org/officeDocument/2006/relationships" id="2147483653" r:id="Rda7e6cae35dc41fc"/>
-    <p:sldLayoutId xmlns:r="http://schemas.openxmlformats.org/officeDocument/2006/relationships" id="2147483654" r:id="Rc27f717ef98c41e2"/>
-    <p:sldLayoutId xmlns:r="http://schemas.openxmlformats.org/officeDocument/2006/relationships" id="2147483655" r:id="R65fdd3d8d5904e7d"/>
-    <p:sldLayoutId xmlns:r="http://schemas.openxmlformats.org/officeDocument/2006/relationships" id="2147483656" r:id="R39909034cbd34d96"/>
-    <p:sldLayoutId xmlns:r="http://schemas.openxmlformats.org/officeDocument/2006/relationships" id="2147483657" r:id="R3b75ff03994147dd"/>
-    <p:sldLayoutId xmlns:r="http://schemas.openxmlformats.org/officeDocument/2006/relationships" id="2147483658" r:id="Rbdf08cf2072c4cd5"/>
-    <p:sldLayoutId xmlns:r="http://schemas.openxmlformats.org/officeDocument/2006/relationships" id="2147483659" r:id="R9254b38263fe414a"/>
+    <p:sldLayoutId xmlns:r="http://schemas.openxmlformats.org/officeDocument/2006/relationships" id="2147483649" r:id="R9529dbdb0371400a"/>
+    <p:sldLayoutId xmlns:r="http://schemas.openxmlformats.org/officeDocument/2006/relationships" id="2147483650" r:id="R00be41f87300482d"/>
+    <p:sldLayoutId xmlns:r="http://schemas.openxmlformats.org/officeDocument/2006/relationships" id="2147483651" r:id="R9c42396af41e42c0"/>
+    <p:sldLayoutId xmlns:r="http://schemas.openxmlformats.org/officeDocument/2006/relationships" id="2147483652" r:id="Re343bf0b9bac4e6b"/>
+    <p:sldLayoutId xmlns:r="http://schemas.openxmlformats.org/officeDocument/2006/relationships" id="2147483653" r:id="R653f9dd1635e4c45"/>
+    <p:sldLayoutId xmlns:r="http://schemas.openxmlformats.org/officeDocument/2006/relationships" id="2147483654" r:id="R180e29dee83b4f0a"/>
+    <p:sldLayoutId xmlns:r="http://schemas.openxmlformats.org/officeDocument/2006/relationships" id="2147483655" r:id="Rc85d5b7ad9e849bd"/>
+    <p:sldLayoutId xmlns:r="http://schemas.openxmlformats.org/officeDocument/2006/relationships" id="2147483656" r:id="R71258d1fc1774308"/>
+    <p:sldLayoutId xmlns:r="http://schemas.openxmlformats.org/officeDocument/2006/relationships" id="2147483657" r:id="Rfa4fe2fde0794b30"/>
+    <p:sldLayoutId xmlns:r="http://schemas.openxmlformats.org/officeDocument/2006/relationships" id="2147483658" r:id="Red7eb39a671148fd"/>
+    <p:sldLayoutId xmlns:r="http://schemas.openxmlformats.org/officeDocument/2006/relationships" id="2147483659" r:id="Ra83de4989578469c"/>
   </p:sldLayoutIdLst>
   <p:hf hdr="0" ftr="0" dt="0"/>
   <p:txStyles>

--- a/Mapped Curriculum Lessons/Grade 8/Lesson 29 - Updating 2D List Cells/Updating 2D List Cells - Slides.pptx
+++ b/Mapped Curriculum Lessons/Grade 8/Lesson 29 - Updating 2D List Cells/Updating 2D List Cells - Slides.pptx
@@ -2,28 +2,28 @@
 <file path=ppt/presentation.xml><?xml version="1.0" encoding="utf-8"?>
 <p:presentation xmlns:p="http://schemas.openxmlformats.org/presentationml/2006/main" embedTrueTypeFonts="1" saveSubsetFonts="0">
   <p:sldMasterIdLst>
-    <p:sldMasterId xmlns:r="http://schemas.openxmlformats.org/officeDocument/2006/relationships" id="2147483648" r:id="R22efc46a4d714207"/>
+    <p:sldMasterId xmlns:r="http://schemas.openxmlformats.org/officeDocument/2006/relationships" id="2147483648" r:id="R675abe811b92494b"/>
   </p:sldMasterIdLst>
   <p:notesMasterIdLst>
-    <p:notesMasterId xmlns:r="http://schemas.openxmlformats.org/officeDocument/2006/relationships" r:id="Rd2a7cfc599b74d6d"/>
+    <p:notesMasterId xmlns:r="http://schemas.openxmlformats.org/officeDocument/2006/relationships" r:id="R6e61d180e3c74c1b"/>
   </p:notesMasterIdLst>
   <p:sldIdLst>
-    <p:sldId xmlns:r="http://schemas.openxmlformats.org/officeDocument/2006/relationships" id="256" r:id="Rc6039f668e704fa4"/>
-    <p:sldId xmlns:r="http://schemas.openxmlformats.org/officeDocument/2006/relationships" id="257" r:id="Rc1ca232b5cb14606"/>
-    <p:sldId xmlns:r="http://schemas.openxmlformats.org/officeDocument/2006/relationships" id="258" r:id="R79c66e89e0204295"/>
-    <p:sldId xmlns:r="http://schemas.openxmlformats.org/officeDocument/2006/relationships" id="259" r:id="R0bc480471dac4141"/>
-    <p:sldId xmlns:r="http://schemas.openxmlformats.org/officeDocument/2006/relationships" id="260" r:id="Rbbbbd8f7adb3487e"/>
-    <p:sldId xmlns:r="http://schemas.openxmlformats.org/officeDocument/2006/relationships" id="261" r:id="R12216a7a070a4442"/>
-    <p:sldId xmlns:r="http://schemas.openxmlformats.org/officeDocument/2006/relationships" id="262" r:id="R1e57e4088f9743ec"/>
-    <p:sldId xmlns:r="http://schemas.openxmlformats.org/officeDocument/2006/relationships" id="263" r:id="Rf6c1a94019124d9f"/>
-    <p:sldId xmlns:r="http://schemas.openxmlformats.org/officeDocument/2006/relationships" id="264" r:id="R9db4c1464890417e"/>
+    <p:sldId xmlns:r="http://schemas.openxmlformats.org/officeDocument/2006/relationships" id="256" r:id="R4b6523b1b7de4c67"/>
+    <p:sldId xmlns:r="http://schemas.openxmlformats.org/officeDocument/2006/relationships" id="257" r:id="R6f411b4fc4fc4524"/>
+    <p:sldId xmlns:r="http://schemas.openxmlformats.org/officeDocument/2006/relationships" id="258" r:id="R9814cb525aa64b6c"/>
+    <p:sldId xmlns:r="http://schemas.openxmlformats.org/officeDocument/2006/relationships" id="259" r:id="Rcbb1a4e5dbd24f81"/>
+    <p:sldId xmlns:r="http://schemas.openxmlformats.org/officeDocument/2006/relationships" id="260" r:id="R4dab5153ffbc4fa0"/>
+    <p:sldId xmlns:r="http://schemas.openxmlformats.org/officeDocument/2006/relationships" id="261" r:id="Rbe3a68f21ca04342"/>
+    <p:sldId xmlns:r="http://schemas.openxmlformats.org/officeDocument/2006/relationships" id="262" r:id="Rc2c5adbba8c94e06"/>
+    <p:sldId xmlns:r="http://schemas.openxmlformats.org/officeDocument/2006/relationships" id="263" r:id="R4088488b506f47d8"/>
+    <p:sldId xmlns:r="http://schemas.openxmlformats.org/officeDocument/2006/relationships" id="264" r:id="Re9ca8f8baa7241b2"/>
   </p:sldIdLst>
   <p:sldSz cx="12192000" cy="6858000"/>
   <p:notesSz cx="6858000" cy="9144000"/>
   <p:embeddedFontLst>
     <p:embeddedFont>
       <p:font typeface="JetBrains Mono"/>
-      <p:regular xmlns:r="http://schemas.openxmlformats.org/officeDocument/2006/relationships" r:id="R6f18dfa0757b4c7b"/>
+      <p:regular xmlns:r="http://schemas.openxmlformats.org/officeDocument/2006/relationships" r:id="R1058b2daaefc475f"/>
     </p:embeddedFont>
   </p:embeddedFontLst>
 </p:presentation>
@@ -1071,7 +1071,7 @@
           <p:nvPr/>
         </p:nvPicPr>
         <p:blipFill rotWithShape="1">
-          <a:blip xmlns:r="http://schemas.openxmlformats.org/officeDocument/2006/relationships" xmlns:a="http://schemas.openxmlformats.org/drawingml/2006/main" r:embed="Rb42da4e4c10a4aba"/>
+          <a:blip xmlns:r="http://schemas.openxmlformats.org/officeDocument/2006/relationships" xmlns:a="http://schemas.openxmlformats.org/drawingml/2006/main" r:embed="R5b1f9ec127fd4145"/>
           <a:stretch xmlns:a="http://schemas.openxmlformats.org/drawingml/2006/main"/>
         </p:blipFill>
         <p:spPr>
@@ -1451,7 +1451,7 @@
           <p:nvPr/>
         </p:nvPicPr>
         <p:blipFill rotWithShape="1">
-          <a:blip xmlns:r="http://schemas.openxmlformats.org/officeDocument/2006/relationships" xmlns:a="http://schemas.openxmlformats.org/drawingml/2006/main" r:embed="R7032edde825c4760">
+          <a:blip xmlns:r="http://schemas.openxmlformats.org/officeDocument/2006/relationships" xmlns:a="http://schemas.openxmlformats.org/drawingml/2006/main" r:embed="R4df4a4d75970443b">
             <a:alphaModFix amt="28000"/>
           </a:blip>
           <a:stretch xmlns:a="http://schemas.openxmlformats.org/drawingml/2006/main"/>
@@ -1664,7 +1664,7 @@
           <p:nvPr/>
         </p:nvPicPr>
         <p:blipFill rotWithShape="1">
-          <a:blip xmlns:r="http://schemas.openxmlformats.org/officeDocument/2006/relationships" xmlns:a="http://schemas.openxmlformats.org/drawingml/2006/main" r:embed="R4997285737e5404d">
+          <a:blip xmlns:r="http://schemas.openxmlformats.org/officeDocument/2006/relationships" xmlns:a="http://schemas.openxmlformats.org/drawingml/2006/main" r:embed="Rfe0140ebdc064bdf">
             <a:alphaModFix amt="28000"/>
           </a:blip>
           <a:stretch xmlns:a="http://schemas.openxmlformats.org/drawingml/2006/main"/>
@@ -1899,7 +1899,7 @@
           <p:nvPr/>
         </p:nvPicPr>
         <p:blipFill rotWithShape="1">
-          <a:blip xmlns:r="http://schemas.openxmlformats.org/officeDocument/2006/relationships" xmlns:a="http://schemas.openxmlformats.org/drawingml/2006/main" r:embed="R9a16e40908e544c8">
+          <a:blip xmlns:r="http://schemas.openxmlformats.org/officeDocument/2006/relationships" xmlns:a="http://schemas.openxmlformats.org/drawingml/2006/main" r:embed="R0dbdb6373fa24821">
             <a:alphaModFix amt="28000"/>
           </a:blip>
           <a:stretch xmlns:a="http://schemas.openxmlformats.org/drawingml/2006/main"/>
@@ -2176,7 +2176,7 @@
           <p:nvPr/>
         </p:nvPicPr>
         <p:blipFill rotWithShape="1">
-          <a:blip xmlns:r="http://schemas.openxmlformats.org/officeDocument/2006/relationships" xmlns:a="http://schemas.openxmlformats.org/drawingml/2006/main" r:embed="R7047a7b90d1c4913">
+          <a:blip xmlns:r="http://schemas.openxmlformats.org/officeDocument/2006/relationships" xmlns:a="http://schemas.openxmlformats.org/drawingml/2006/main" r:embed="Ra4f98b4fb22441ba">
             <a:alphaModFix amt="28000"/>
           </a:blip>
           <a:stretch xmlns:a="http://schemas.openxmlformats.org/drawingml/2006/main"/>
@@ -2451,7 +2451,7 @@
           <p:nvPr/>
         </p:nvPicPr>
         <p:blipFill rotWithShape="1">
-          <a:blip xmlns:r="http://schemas.openxmlformats.org/officeDocument/2006/relationships" xmlns:a="http://schemas.openxmlformats.org/drawingml/2006/main" r:embed="R64c1e9d6ee5f40c1">
+          <a:blip xmlns:r="http://schemas.openxmlformats.org/officeDocument/2006/relationships" xmlns:a="http://schemas.openxmlformats.org/drawingml/2006/main" r:embed="R84e44365b67744af">
             <a:alphaModFix amt="28000"/>
           </a:blip>
           <a:stretch xmlns:a="http://schemas.openxmlformats.org/drawingml/2006/main"/>
@@ -2875,7 +2875,7 @@
           <p:nvPr/>
         </p:nvPicPr>
         <p:blipFill rotWithShape="1">
-          <a:blip xmlns:r="http://schemas.openxmlformats.org/officeDocument/2006/relationships" xmlns:a="http://schemas.openxmlformats.org/drawingml/2006/main" r:embed="R1e814563db924d48">
+          <a:blip xmlns:r="http://schemas.openxmlformats.org/officeDocument/2006/relationships" xmlns:a="http://schemas.openxmlformats.org/drawingml/2006/main" r:embed="Rd41d4d860b8a4bed">
             <a:alphaModFix amt="28000"/>
           </a:blip>
           <a:stretch xmlns:a="http://schemas.openxmlformats.org/drawingml/2006/main"/>
@@ -3016,7 +3016,7 @@
           <p:nvPr/>
         </p:nvPicPr>
         <p:blipFill rotWithShape="1">
-          <a:blip xmlns:r="http://schemas.openxmlformats.org/officeDocument/2006/relationships" xmlns:a="http://schemas.openxmlformats.org/drawingml/2006/main" r:embed="R6b79488d45cc4cef">
+          <a:blip xmlns:r="http://schemas.openxmlformats.org/officeDocument/2006/relationships" xmlns:a="http://schemas.openxmlformats.org/drawingml/2006/main" r:embed="R5214372e26b84fe5">
             <a:alphaModFix amt="28000"/>
           </a:blip>
           <a:stretch xmlns:a="http://schemas.openxmlformats.org/drawingml/2006/main"/>
@@ -3130,7 +3130,7 @@
           <p:nvPr/>
         </p:nvPicPr>
         <p:blipFill rotWithShape="1">
-          <a:blip xmlns:r="http://schemas.openxmlformats.org/officeDocument/2006/relationships" xmlns:a="http://schemas.openxmlformats.org/drawingml/2006/main" r:embed="Re4475203fefb4e8c">
+          <a:blip xmlns:r="http://schemas.openxmlformats.org/officeDocument/2006/relationships" xmlns:a="http://schemas.openxmlformats.org/drawingml/2006/main" r:embed="R8119fa5b39f345d3">
             <a:alphaModFix amt="28000"/>
           </a:blip>
           <a:stretch xmlns:a="http://schemas.openxmlformats.org/drawingml/2006/main"/>
@@ -3457,7 +3457,7 @@
           <p:nvPr/>
         </p:nvPicPr>
         <p:blipFill rotWithShape="1">
-          <a:blip xmlns:r="http://schemas.openxmlformats.org/officeDocument/2006/relationships" xmlns:a="http://schemas.openxmlformats.org/drawingml/2006/main" r:embed="Rf13d0bc20db047e0">
+          <a:blip xmlns:r="http://schemas.openxmlformats.org/officeDocument/2006/relationships" xmlns:a="http://schemas.openxmlformats.org/drawingml/2006/main" r:embed="Redc5d7538cbd4d8e">
             <a:alphaModFix amt="28000"/>
           </a:blip>
           <a:stretch xmlns:a="http://schemas.openxmlformats.org/drawingml/2006/main"/>
@@ -3745,7 +3745,7 @@
           <p:nvPr/>
         </p:nvPicPr>
         <p:blipFill rotWithShape="1">
-          <a:blip xmlns:r="http://schemas.openxmlformats.org/officeDocument/2006/relationships" xmlns:a="http://schemas.openxmlformats.org/drawingml/2006/main" r:embed="Rb018c969d03a49a2">
+          <a:blip xmlns:r="http://schemas.openxmlformats.org/officeDocument/2006/relationships" xmlns:a="http://schemas.openxmlformats.org/drawingml/2006/main" r:embed="R697b546393964cfd">
             <a:alphaModFix amt="28000"/>
           </a:blip>
           <a:stretch xmlns:a="http://schemas.openxmlformats.org/drawingml/2006/main"/>
@@ -3982,17 +3982,17 @@
   </p:cSld>
   <p:clrMap bg1="lt1" tx1="dk1" bg2="lt2" tx2="dk2" accent1="accent1" accent2="accent2" accent3="accent3" accent4="accent4" accent5="accent5" accent6="accent6" hlink="hlink" folHlink="folHlink"/>
   <p:sldLayoutIdLst>
-    <p:sldLayoutId xmlns:r="http://schemas.openxmlformats.org/officeDocument/2006/relationships" id="2147483649" r:id="R9529dbdb0371400a"/>
-    <p:sldLayoutId xmlns:r="http://schemas.openxmlformats.org/officeDocument/2006/relationships" id="2147483650" r:id="R00be41f87300482d"/>
-    <p:sldLayoutId xmlns:r="http://schemas.openxmlformats.org/officeDocument/2006/relationships" id="2147483651" r:id="R9c42396af41e42c0"/>
-    <p:sldLayoutId xmlns:r="http://schemas.openxmlformats.org/officeDocument/2006/relationships" id="2147483652" r:id="Re343bf0b9bac4e6b"/>
-    <p:sldLayoutId xmlns:r="http://schemas.openxmlformats.org/officeDocument/2006/relationships" id="2147483653" r:id="R653f9dd1635e4c45"/>
-    <p:sldLayoutId xmlns:r="http://schemas.openxmlformats.org/officeDocument/2006/relationships" id="2147483654" r:id="R180e29dee83b4f0a"/>
-    <p:sldLayoutId xmlns:r="http://schemas.openxmlformats.org/officeDocument/2006/relationships" id="2147483655" r:id="Rc85d5b7ad9e849bd"/>
-    <p:sldLayoutId xmlns:r="http://schemas.openxmlformats.org/officeDocument/2006/relationships" id="2147483656" r:id="R71258d1fc1774308"/>
-    <p:sldLayoutId xmlns:r="http://schemas.openxmlformats.org/officeDocument/2006/relationships" id="2147483657" r:id="Rfa4fe2fde0794b30"/>
-    <p:sldLayoutId xmlns:r="http://schemas.openxmlformats.org/officeDocument/2006/relationships" id="2147483658" r:id="Red7eb39a671148fd"/>
-    <p:sldLayoutId xmlns:r="http://schemas.openxmlformats.org/officeDocument/2006/relationships" id="2147483659" r:id="Ra83de4989578469c"/>
+    <p:sldLayoutId xmlns:r="http://schemas.openxmlformats.org/officeDocument/2006/relationships" id="2147483649" r:id="R24519340b7d34db9"/>
+    <p:sldLayoutId xmlns:r="http://schemas.openxmlformats.org/officeDocument/2006/relationships" id="2147483650" r:id="R40f55e3a472247ea"/>
+    <p:sldLayoutId xmlns:r="http://schemas.openxmlformats.org/officeDocument/2006/relationships" id="2147483651" r:id="R47b800a5925f4667"/>
+    <p:sldLayoutId xmlns:r="http://schemas.openxmlformats.org/officeDocument/2006/relationships" id="2147483652" r:id="R4cc5525b00a54eba"/>
+    <p:sldLayoutId xmlns:r="http://schemas.openxmlformats.org/officeDocument/2006/relationships" id="2147483653" r:id="Raf2c6f8fd8394e5b"/>
+    <p:sldLayoutId xmlns:r="http://schemas.openxmlformats.org/officeDocument/2006/relationships" id="2147483654" r:id="R71a0454439f24187"/>
+    <p:sldLayoutId xmlns:r="http://schemas.openxmlformats.org/officeDocument/2006/relationships" id="2147483655" r:id="R177b568f61b844ef"/>
+    <p:sldLayoutId xmlns:r="http://schemas.openxmlformats.org/officeDocument/2006/relationships" id="2147483656" r:id="R5b9b1575199f4fb8"/>
+    <p:sldLayoutId xmlns:r="http://schemas.openxmlformats.org/officeDocument/2006/relationships" id="2147483657" r:id="R3d79e7908af6447e"/>
+    <p:sldLayoutId xmlns:r="http://schemas.openxmlformats.org/officeDocument/2006/relationships" id="2147483658" r:id="R9807fe33916a4702"/>
+    <p:sldLayoutId xmlns:r="http://schemas.openxmlformats.org/officeDocument/2006/relationships" id="2147483659" r:id="R986b427b805c4c44"/>
   </p:sldLayoutIdLst>
   <p:hf hdr="0" ftr="0" dt="0"/>
   <p:txStyles>
